--- a/docs/Suicide_forcasting_note_slides.pptx
+++ b/docs/Suicide_forcasting_note_slides.pptx
@@ -104,6 +104,11 @@
       </a:defRPr>
     </a:lvl9pPr>
   </p:defaultTextStyle>
+  <p:extLst>
+    <p:ext uri="{EFAFB233-063F-42B5-8137-9DF3F51BA10A}">
+      <p15:sldGuideLst xmlns:p15="http://schemas.microsoft.com/office/powerpoint/2012/main"/>
+    </p:ext>
+  </p:extLst>
 </p:presentation>
 </file>
 
@@ -254,7 +259,7 @@
           <a:p>
             <a:fld id="{284D3263-2354-CD44-9F4E-309523F734AC}" type="datetimeFigureOut">
               <a:rPr lang="en-US" smtClean="0"/>
-              <a:t>6/3/26</a:t>
+              <a:t>6/4/26</a:t>
             </a:fld>
             <a:endParaRPr lang="en-US"/>
           </a:p>
@@ -452,7 +457,7 @@
           <a:p>
             <a:fld id="{284D3263-2354-CD44-9F4E-309523F734AC}" type="datetimeFigureOut">
               <a:rPr lang="en-US" smtClean="0"/>
-              <a:t>6/3/26</a:t>
+              <a:t>6/4/26</a:t>
             </a:fld>
             <a:endParaRPr lang="en-US"/>
           </a:p>
@@ -660,7 +665,7 @@
           <a:p>
             <a:fld id="{284D3263-2354-CD44-9F4E-309523F734AC}" type="datetimeFigureOut">
               <a:rPr lang="en-US" smtClean="0"/>
-              <a:t>6/3/26</a:t>
+              <a:t>6/4/26</a:t>
             </a:fld>
             <a:endParaRPr lang="en-US"/>
           </a:p>
@@ -858,7 +863,7 @@
           <a:p>
             <a:fld id="{284D3263-2354-CD44-9F4E-309523F734AC}" type="datetimeFigureOut">
               <a:rPr lang="en-US" smtClean="0"/>
-              <a:t>6/3/26</a:t>
+              <a:t>6/4/26</a:t>
             </a:fld>
             <a:endParaRPr lang="en-US"/>
           </a:p>
@@ -1133,7 +1138,7 @@
           <a:p>
             <a:fld id="{284D3263-2354-CD44-9F4E-309523F734AC}" type="datetimeFigureOut">
               <a:rPr lang="en-US" smtClean="0"/>
-              <a:t>6/3/26</a:t>
+              <a:t>6/4/26</a:t>
             </a:fld>
             <a:endParaRPr lang="en-US"/>
           </a:p>
@@ -1398,7 +1403,7 @@
           <a:p>
             <a:fld id="{284D3263-2354-CD44-9F4E-309523F734AC}" type="datetimeFigureOut">
               <a:rPr lang="en-US" smtClean="0"/>
-              <a:t>6/3/26</a:t>
+              <a:t>6/4/26</a:t>
             </a:fld>
             <a:endParaRPr lang="en-US"/>
           </a:p>
@@ -1810,7 +1815,7 @@
           <a:p>
             <a:fld id="{284D3263-2354-CD44-9F4E-309523F734AC}" type="datetimeFigureOut">
               <a:rPr lang="en-US" smtClean="0"/>
-              <a:t>6/3/26</a:t>
+              <a:t>6/4/26</a:t>
             </a:fld>
             <a:endParaRPr lang="en-US"/>
           </a:p>
@@ -1951,7 +1956,7 @@
           <a:p>
             <a:fld id="{284D3263-2354-CD44-9F4E-309523F734AC}" type="datetimeFigureOut">
               <a:rPr lang="en-US" smtClean="0"/>
-              <a:t>6/3/26</a:t>
+              <a:t>6/4/26</a:t>
             </a:fld>
             <a:endParaRPr lang="en-US"/>
           </a:p>
@@ -2064,7 +2069,7 @@
           <a:p>
             <a:fld id="{284D3263-2354-CD44-9F4E-309523F734AC}" type="datetimeFigureOut">
               <a:rPr lang="en-US" smtClean="0"/>
-              <a:t>6/3/26</a:t>
+              <a:t>6/4/26</a:t>
             </a:fld>
             <a:endParaRPr lang="en-US"/>
           </a:p>
@@ -2375,7 +2380,7 @@
           <a:p>
             <a:fld id="{284D3263-2354-CD44-9F4E-309523F734AC}" type="datetimeFigureOut">
               <a:rPr lang="en-US" smtClean="0"/>
-              <a:t>6/3/26</a:t>
+              <a:t>6/4/26</a:t>
             </a:fld>
             <a:endParaRPr lang="en-US"/>
           </a:p>
@@ -2663,7 +2668,7 @@
           <a:p>
             <a:fld id="{284D3263-2354-CD44-9F4E-309523F734AC}" type="datetimeFigureOut">
               <a:rPr lang="en-US" smtClean="0"/>
-              <a:t>6/3/26</a:t>
+              <a:t>6/4/26</a:t>
             </a:fld>
             <a:endParaRPr lang="en-US"/>
           </a:p>
@@ -2904,7 +2909,7 @@
           <a:p>
             <a:fld id="{284D3263-2354-CD44-9F4E-309523F734AC}" type="datetimeFigureOut">
               <a:rPr lang="en-US" smtClean="0"/>
-              <a:t>6/3/26</a:t>
+              <a:t>6/4/26</a:t>
             </a:fld>
             <a:endParaRPr lang="en-US"/>
           </a:p>
@@ -3321,56 +3326,6 @@
           <a:chExt cx="0" cy="0"/>
         </a:xfrm>
       </p:grpSpPr>
-      <p:sp>
-        <p:nvSpPr>
-          <p:cNvPr id="2" name="Title 1">
-            <a:extLst>
-              <a:ext uri="{FF2B5EF4-FFF2-40B4-BE49-F238E27FC236}">
-                <a16:creationId xmlns:a16="http://schemas.microsoft.com/office/drawing/2014/main" id="{E5AC6684-8455-1AAD-EEF5-8F5CCAFED33A}"/>
-              </a:ext>
-            </a:extLst>
-          </p:cNvPr>
-          <p:cNvSpPr>
-            <a:spLocks noGrp="1"/>
-          </p:cNvSpPr>
-          <p:nvPr>
-            <p:ph type="ctrTitle"/>
-          </p:nvPr>
-        </p:nvSpPr>
-        <p:spPr/>
-        <p:txBody>
-          <a:bodyPr/>
-          <a:lstStyle/>
-          <a:p>
-            <a:endParaRPr lang="en-US"/>
-          </a:p>
-        </p:txBody>
-      </p:sp>
-      <p:sp>
-        <p:nvSpPr>
-          <p:cNvPr id="3" name="Subtitle 2">
-            <a:extLst>
-              <a:ext uri="{FF2B5EF4-FFF2-40B4-BE49-F238E27FC236}">
-                <a16:creationId xmlns:a16="http://schemas.microsoft.com/office/drawing/2014/main" id="{FAA8D501-D31A-31DE-2BAA-C6726B40F8E7}"/>
-              </a:ext>
-            </a:extLst>
-          </p:cNvPr>
-          <p:cNvSpPr>
-            <a:spLocks noGrp="1"/>
-          </p:cNvSpPr>
-          <p:nvPr>
-            <p:ph type="subTitle" idx="1"/>
-          </p:nvPr>
-        </p:nvSpPr>
-        <p:spPr/>
-        <p:txBody>
-          <a:bodyPr/>
-          <a:lstStyle/>
-          <a:p>
-            <a:endParaRPr lang="en-US"/>
-          </a:p>
-        </p:txBody>
-      </p:sp>
     </p:spTree>
     <p:extLst>
       <p:ext uri="{BB962C8B-B14F-4D97-AF65-F5344CB8AC3E}">

--- a/docs/Suicide_forcasting_note_slides.pptx
+++ b/docs/Suicide_forcasting_note_slides.pptx
@@ -9084,42 +9084,42 @@
           <p:nvPr>
             <p:extLst>
               <p:ext uri="{D42A27DB-BD31-4B8C-83A1-F6EECF244321}">
-                <p14:modId xmlns:p14="http://schemas.microsoft.com/office/powerpoint/2010/main" val="1769945641"/>
+                <p14:modId xmlns:p14="http://schemas.microsoft.com/office/powerpoint/2010/main" val="1062193120"/>
               </p:ext>
             </p:extLst>
           </p:nvPr>
         </p:nvGraphicFramePr>
         <p:xfrm>
-          <a:off x="201168" y="1590315"/>
-          <a:ext cx="11777472" cy="2088045"/>
+          <a:off x="1193205" y="1538557"/>
+          <a:ext cx="9969374" cy="2088045"/>
         </p:xfrm>
         <a:graphic>
           <a:graphicData uri="http://schemas.openxmlformats.org/drawingml/2006/table">
             <a:tbl>
               <a:tblPr/>
               <a:tblGrid>
-                <a:gridCol w="332572">
+                <a:gridCol w="281515">
                   <a:extLst>
                     <a:ext uri="{9D8B030D-6E8A-4147-A177-3AD203B41FA5}">
                       <a16:colId xmlns:a16="http://schemas.microsoft.com/office/drawing/2014/main" val="20000"/>
                     </a:ext>
                   </a:extLst>
                 </a:gridCol>
-                <a:gridCol w="5401719">
+                <a:gridCol w="4572438">
                   <a:extLst>
                     <a:ext uri="{9D8B030D-6E8A-4147-A177-3AD203B41FA5}">
                       <a16:colId xmlns:a16="http://schemas.microsoft.com/office/drawing/2014/main" val="20001"/>
                     </a:ext>
                   </a:extLst>
                 </a:gridCol>
-                <a:gridCol w="3936269">
+                <a:gridCol w="3331966">
                   <a:extLst>
                     <a:ext uri="{9D8B030D-6E8A-4147-A177-3AD203B41FA5}">
                       <a16:colId xmlns:a16="http://schemas.microsoft.com/office/drawing/2014/main" val="20002"/>
                     </a:ext>
                   </a:extLst>
                 </a:gridCol>
-                <a:gridCol w="2106912">
+                <a:gridCol w="1783455">
                   <a:extLst>
                     <a:ext uri="{9D8B030D-6E8A-4147-A177-3AD203B41FA5}">
                       <a16:colId xmlns:a16="http://schemas.microsoft.com/office/drawing/2014/main" val="20003"/>
@@ -10014,7 +10014,7 @@
           <p:nvPr>
             <p:extLst>
               <p:ext uri="{D42A27DB-BD31-4B8C-83A1-F6EECF244321}">
-                <p14:modId xmlns:p14="http://schemas.microsoft.com/office/powerpoint/2010/main" val="3172116850"/>
+                <p14:modId xmlns:p14="http://schemas.microsoft.com/office/powerpoint/2010/main" val="2956625822"/>
               </p:ext>
             </p:extLst>
           </p:nvPr>
@@ -10368,19 +10368,27 @@
                     <a:bodyPr/>
                     <a:lstStyle/>
                     <a:p>
-                      <a:pPr marL="0" indent="0">
-                        <a:buNone/>
+                      <a:pPr marL="0" marR="0" lvl="0" indent="0" algn="l" defTabSz="914400" rtl="0" eaLnBrk="1" fontAlgn="auto" latinLnBrk="0" hangingPunct="1">
+                        <a:lnSpc>
+                          <a:spcPct val="100000"/>
+                        </a:lnSpc>
+                        <a:spcBef>
+                          <a:spcPts val="0"/>
+                        </a:spcBef>
+                        <a:spcAft>
+                          <a:spcPts val="0"/>
+                        </a:spcAft>
+                        <a:buClrTx/>
+                        <a:buSzTx/>
+                        <a:buFontTx/>
+                        <a:buNone/>
+                        <a:tabLst/>
+                        <a:defRPr/>
                       </a:pPr>
                       <a:r>
                         <a:rPr lang="en-US" sz="1400" b="1" dirty="0"/>
-                        <a:t>Bayesian Hierarchical Model / CAR</a:t>
-                      </a:r>
-                      <a:endParaRPr lang="en-US" sz="1400" dirty="0"/>
-                    </a:p>
-                    <a:p>
-                      <a:pPr marL="0" indent="0">
-                        <a:buNone/>
-                      </a:pPr>
+                        <a:t>Bayesian Hierarchical Model, </a:t>
+                      </a:r>
                       <a:r>
                         <a:rPr lang="en-US" sz="1400" dirty="0"/>
                         <a:t>Statistical; spatiotemporal autocorrelation; county &amp; state-level</a:t>
@@ -10394,7 +10402,33 @@
                             <a:schemeClr val="accent6"/>
                           </a:solidFill>
                         </a:rPr>
-                        <a:t>Exponential smoothing</a:t>
+                        <a:t>Exponential smoothing </a:t>
+                      </a:r>
+                      <a:r>
+                        <a:rPr lang="en-US" sz="1400" b="0" kern="1200" dirty="0">
+                          <a:solidFill>
+                            <a:schemeClr val="tx1"/>
+                          </a:solidFill>
+                          <a:latin typeface="+mn-lt"/>
+                          <a:ea typeface="+mn-ea"/>
+                          <a:cs typeface="+mn-cs"/>
+                        </a:rPr>
+                        <a:t>- temporal</a:t>
+                      </a:r>
+                      <a:br>
+                        <a:rPr lang="en-US" sz="1400" b="1" dirty="0">
+                          <a:solidFill>
+                            <a:schemeClr val="accent6"/>
+                          </a:solidFill>
+                        </a:rPr>
+                      </a:br>
+                      <a:r>
+                        <a:rPr lang="en-US" sz="1400" b="1" dirty="0"/>
+                        <a:t>Conditional Autoregressive (CAR)</a:t>
+                      </a:r>
+                      <a:r>
+                        <a:rPr lang="en-US" sz="1400" b="0" dirty="0"/>
+                        <a:t> - spatial</a:t>
                       </a:r>
                     </a:p>
                   </a:txBody>
@@ -11765,7 +11799,7 @@
         <p:spPr>
           <a:xfrm>
             <a:off x="469556" y="6427022"/>
-            <a:ext cx="1472904" cy="307777"/>
+            <a:ext cx="1490536" cy="307777"/>
           </a:xfrm>
           <a:prstGeom prst="rect">
             <a:avLst/>
@@ -11793,7 +11827,7 @@
                 </a:solidFill>
                 <a:hlinkClick r:id="rId10"/>
               </a:rPr>
-              <a:t>darts</a:t>
+              <a:t>Darts</a:t>
             </a:r>
             <a:endParaRPr lang="en-US" sz="1400" b="1" dirty="0">
               <a:solidFill>

--- a/docs/Suicide_forcasting_note_slides.pptx
+++ b/docs/Suicide_forcasting_note_slides.pptx
@@ -5,7 +5,7 @@
     <p:sldMasterId id="2147483648" r:id="rId1"/>
   </p:sldMasterIdLst>
   <p:notesMasterIdLst>
-    <p:notesMasterId r:id="rId10"/>
+    <p:notesMasterId r:id="rId12"/>
   </p:notesMasterIdLst>
   <p:sldIdLst>
     <p:sldId id="257" r:id="rId2"/>
@@ -16,6 +16,8 @@
     <p:sldId id="261" r:id="rId7"/>
     <p:sldId id="262" r:id="rId8"/>
     <p:sldId id="264" r:id="rId9"/>
+    <p:sldId id="267" r:id="rId10"/>
+    <p:sldId id="268" r:id="rId11"/>
   </p:sldIdLst>
   <p:sldSz cx="12192000" cy="6858000"/>
   <p:notesSz cx="6858000" cy="12192000"/>
@@ -272,6 +274,13 @@
           </p:nvPr>
         </p:nvSpPr>
         <p:spPr/>
+        <p:txBody>
+          <a:bodyPr/>
+          <a:lstStyle/>
+          <a:p>
+            <a:endParaRPr lang="en-US"/>
+          </a:p>
+        </p:txBody>
       </p:sp>
       <p:sp>
         <p:nvSpPr>
@@ -356,6 +365,13 @@
           </p:nvPr>
         </p:nvSpPr>
         <p:spPr/>
+        <p:txBody>
+          <a:bodyPr/>
+          <a:lstStyle/>
+          <a:p>
+            <a:endParaRPr lang="en-US"/>
+          </a:p>
+        </p:txBody>
       </p:sp>
       <p:sp>
         <p:nvSpPr>
@@ -440,6 +456,13 @@
           </p:nvPr>
         </p:nvSpPr>
         <p:spPr/>
+        <p:txBody>
+          <a:bodyPr/>
+          <a:lstStyle/>
+          <a:p>
+            <a:endParaRPr lang="en-US"/>
+          </a:p>
+        </p:txBody>
       </p:sp>
       <p:sp>
         <p:nvSpPr>
@@ -524,6 +547,13 @@
           </p:nvPr>
         </p:nvSpPr>
         <p:spPr/>
+        <p:txBody>
+          <a:bodyPr/>
+          <a:lstStyle/>
+          <a:p>
+            <a:endParaRPr lang="en-US"/>
+          </a:p>
+        </p:txBody>
       </p:sp>
       <p:sp>
         <p:nvSpPr>
@@ -608,6 +638,13 @@
           </p:nvPr>
         </p:nvSpPr>
         <p:spPr/>
+        <p:txBody>
+          <a:bodyPr/>
+          <a:lstStyle/>
+          <a:p>
+            <a:endParaRPr lang="en-US"/>
+          </a:p>
+        </p:txBody>
       </p:sp>
       <p:sp>
         <p:nvSpPr>
@@ -692,6 +729,13 @@
           </p:nvPr>
         </p:nvSpPr>
         <p:spPr/>
+        <p:txBody>
+          <a:bodyPr/>
+          <a:lstStyle/>
+          <a:p>
+            <a:endParaRPr lang="en-US"/>
+          </a:p>
+        </p:txBody>
       </p:sp>
       <p:sp>
         <p:nvSpPr>
@@ -1129,28 +1173,28 @@
           <p:nvPr>
             <p:extLst>
               <p:ext uri="{D42A27DB-BD31-4B8C-83A1-F6EECF244321}">
-                <p14:modId xmlns:p14="http://schemas.microsoft.com/office/powerpoint/2010/main" val="1680482763"/>
+                <p14:modId xmlns:p14="http://schemas.microsoft.com/office/powerpoint/2010/main" val="1744334672"/>
               </p:ext>
             </p:extLst>
           </p:nvPr>
         </p:nvGraphicFramePr>
         <p:xfrm>
           <a:off x="1423357" y="1351587"/>
-          <a:ext cx="8333118" cy="3407664"/>
+          <a:ext cx="8333118" cy="2225273"/>
         </p:xfrm>
         <a:graphic>
           <a:graphicData uri="http://schemas.openxmlformats.org/drawingml/2006/table">
             <a:tbl>
               <a:tblPr/>
               <a:tblGrid>
-                <a:gridCol w="970472">
+                <a:gridCol w="1154473">
                   <a:extLst>
                     <a:ext uri="{9D8B030D-6E8A-4147-A177-3AD203B41FA5}">
                       <a16:colId xmlns:a16="http://schemas.microsoft.com/office/drawing/2014/main" val="20000"/>
                     </a:ext>
                   </a:extLst>
                 </a:gridCol>
-                <a:gridCol w="7362646">
+                <a:gridCol w="7178645">
                   <a:extLst>
                     <a:ext uri="{9D8B030D-6E8A-4147-A177-3AD203B41FA5}">
                       <a16:colId xmlns:a16="http://schemas.microsoft.com/office/drawing/2014/main" val="20001"/>
@@ -1158,130 +1202,7 @@
                   </a:extLst>
                 </a:gridCol>
               </a:tblGrid>
-              <a:tr h="658368">
-                <a:tc>
-                  <a:txBody>
-                    <a:bodyPr/>
-                    <a:lstStyle/>
-                    <a:p>
-                      <a:pPr marL="0" indent="0" algn="ctr">
-                        <a:buNone/>
-                      </a:pPr>
-                      <a:r>
-                        <a:rPr lang="en-US" sz="1400" b="1" dirty="0">
-                          <a:solidFill>
-                            <a:srgbClr val="000000"/>
-                          </a:solidFill>
-                        </a:rPr>
-                        <a:t>Tag</a:t>
-                      </a:r>
-                      <a:endParaRPr lang="en-US" sz="1400" dirty="0"/>
-                    </a:p>
-                  </a:txBody>
-                  <a:tcPr marL="63500" marR="63500" marT="38100" marB="38100" anchor="ctr">
-                    <a:lnL w="12700" cap="flat" cmpd="sng" algn="ctr">
-                      <a:solidFill>
-                        <a:srgbClr val="000000"/>
-                      </a:solidFill>
-                      <a:prstDash val="solid"/>
-                      <a:round/>
-                      <a:headEnd type="none" w="med" len="med"/>
-                      <a:tailEnd type="none" w="med" len="med"/>
-                    </a:lnL>
-                    <a:lnR w="12700" cap="flat" cmpd="sng" algn="ctr">
-                      <a:solidFill>
-                        <a:srgbClr val="000000"/>
-                      </a:solidFill>
-                      <a:prstDash val="solid"/>
-                      <a:round/>
-                      <a:headEnd type="none" w="med" len="med"/>
-                      <a:tailEnd type="none" w="med" len="med"/>
-                    </a:lnR>
-                    <a:lnT w="12700" cap="flat" cmpd="sng" algn="ctr">
-                      <a:solidFill>
-                        <a:srgbClr val="000000"/>
-                      </a:solidFill>
-                      <a:prstDash val="solid"/>
-                      <a:round/>
-                      <a:headEnd type="none" w="med" len="med"/>
-                      <a:tailEnd type="none" w="med" len="med"/>
-                    </a:lnT>
-                    <a:lnB w="12700" cap="flat" cmpd="sng" algn="ctr">
-                      <a:solidFill>
-                        <a:srgbClr val="000000"/>
-                      </a:solidFill>
-                      <a:prstDash val="solid"/>
-                      <a:round/>
-                      <a:headEnd type="none" w="med" len="med"/>
-                      <a:tailEnd type="none" w="med" len="med"/>
-                    </a:lnB>
-                  </a:tcPr>
-                </a:tc>
-                <a:tc>
-                  <a:txBody>
-                    <a:bodyPr/>
-                    <a:lstStyle/>
-                    <a:p>
-                      <a:pPr marL="0" indent="0">
-                        <a:buNone/>
-                      </a:pPr>
-                      <a:r>
-                        <a:rPr lang="en-US" sz="1400" b="1" dirty="0">
-                          <a:solidFill>
-                            <a:srgbClr val="000000"/>
-                          </a:solidFill>
-                        </a:rPr>
-                        <a:t>Full Name &amp; Description</a:t>
-                      </a:r>
-                      <a:endParaRPr lang="en-US" sz="1400" dirty="0"/>
-                    </a:p>
-                  </a:txBody>
-                  <a:tcPr marL="63500" marR="63500" marT="38100" marB="38100" anchor="ctr">
-                    <a:lnL w="12700" cap="flat" cmpd="sng" algn="ctr">
-                      <a:solidFill>
-                        <a:srgbClr val="000000"/>
-                      </a:solidFill>
-                      <a:prstDash val="solid"/>
-                      <a:round/>
-                      <a:headEnd type="none" w="med" len="med"/>
-                      <a:tailEnd type="none" w="med" len="med"/>
-                    </a:lnL>
-                    <a:lnR w="12700" cap="flat" cmpd="sng" algn="ctr">
-                      <a:solidFill>
-                        <a:srgbClr val="000000"/>
-                      </a:solidFill>
-                      <a:prstDash val="solid"/>
-                      <a:round/>
-                      <a:headEnd type="none" w="med" len="med"/>
-                      <a:tailEnd type="none" w="med" len="med"/>
-                    </a:lnR>
-                    <a:lnT w="12700" cap="flat" cmpd="sng" algn="ctr">
-                      <a:solidFill>
-                        <a:srgbClr val="000000"/>
-                      </a:solidFill>
-                      <a:prstDash val="solid"/>
-                      <a:round/>
-                      <a:headEnd type="none" w="med" len="med"/>
-                      <a:tailEnd type="none" w="med" len="med"/>
-                    </a:lnT>
-                    <a:lnB w="12700" cap="flat" cmpd="sng" algn="ctr">
-                      <a:solidFill>
-                        <a:srgbClr val="000000"/>
-                      </a:solidFill>
-                      <a:prstDash val="solid"/>
-                      <a:round/>
-                      <a:headEnd type="none" w="med" len="med"/>
-                      <a:tailEnd type="none" w="med" len="med"/>
-                    </a:lnB>
-                  </a:tcPr>
-                </a:tc>
-                <a:extLst>
-                  <a:ext uri="{0D108BD9-81ED-4DB2-BD59-A6C34878D82A}">
-                    <a16:rowId xmlns:a16="http://schemas.microsoft.com/office/drawing/2014/main" val="10000"/>
-                  </a:ext>
-                </a:extLst>
-              </a:tr>
-              <a:tr h="580768">
+              <a:tr h="315631">
                 <a:tc>
                   <a:txBody>
                     <a:bodyPr/>
@@ -1315,7 +1236,7 @@
                       <a:endParaRPr lang="en-US" sz="1400" dirty="0"/>
                     </a:p>
                   </a:txBody>
-                  <a:tcPr marL="63500" marR="63500" marT="38100" marB="38100">
+                  <a:tcPr marL="63500" marR="63500" marT="38100" marB="38100" anchor="ctr">
                     <a:lnL w="12700" cap="flat" cmpd="sng" algn="ctr">
                       <a:solidFill>
                         <a:srgbClr val="000000"/>
@@ -1401,14 +1322,8 @@
                       </a:r>
                       <a:endParaRPr lang="en-US" sz="1400" dirty="0"/>
                     </a:p>
-                    <a:p>
-                      <a:pPr marL="0" indent="0">
-                        <a:buNone/>
-                      </a:pPr>
-                      <a:endParaRPr lang="en-US" sz="1400" dirty="0"/>
-                    </a:p>
-                  </a:txBody>
-                  <a:tcPr marL="63500" marR="63500" marT="38100" marB="38100">
+                  </a:txBody>
+                  <a:tcPr marL="63500" marR="63500" marT="38100" marB="38100" anchor="ctr">
                     <a:lnL w="12700" cap="flat" cmpd="sng" algn="ctr">
                       <a:solidFill>
                         <a:srgbClr val="000000"/>
@@ -1453,7 +1368,7 @@
                   </a:ext>
                 </a:extLst>
               </a:tr>
-              <a:tr h="658368">
+              <a:tr h="347705">
                 <a:tc>
                   <a:txBody>
                     <a:bodyPr/>
@@ -1473,7 +1388,7 @@
                       <a:endParaRPr lang="en-US" sz="1400" dirty="0"/>
                     </a:p>
                   </a:txBody>
-                  <a:tcPr marL="63500" marR="63500" marT="38100" marB="38100">
+                  <a:tcPr marL="63500" marR="63500" marT="38100" marB="38100" anchor="ctr">
                     <a:lnL w="12700" cap="flat" cmpd="sng" algn="ctr">
                       <a:solidFill>
                         <a:srgbClr val="000000"/>
@@ -1531,7 +1446,7 @@
                       <a:endParaRPr lang="en-US" sz="1400" dirty="0"/>
                     </a:p>
                   </a:txBody>
-                  <a:tcPr marL="63500" marR="63500" marT="38100" marB="38100">
+                  <a:tcPr marL="63500" marR="63500" marT="38100" marB="38100" anchor="ctr">
                     <a:lnL w="12700" cap="flat" cmpd="sng" algn="ctr">
                       <a:solidFill>
                         <a:srgbClr val="000000"/>
@@ -1582,8 +1497,22 @@
                     <a:bodyPr/>
                     <a:lstStyle/>
                     <a:p>
-                      <a:pPr marL="0" indent="0" algn="ctr">
-                        <a:buNone/>
+                      <a:pPr marL="0" marR="0" lvl="0" indent="0" algn="ctr" defTabSz="914400" rtl="0" eaLnBrk="1" fontAlgn="auto" latinLnBrk="0" hangingPunct="1">
+                        <a:lnSpc>
+                          <a:spcPct val="100000"/>
+                        </a:lnSpc>
+                        <a:spcBef>
+                          <a:spcPts val="0"/>
+                        </a:spcBef>
+                        <a:spcAft>
+                          <a:spcPts val="0"/>
+                        </a:spcAft>
+                        <a:buClrTx/>
+                        <a:buSzTx/>
+                        <a:buFontTx/>
+                        <a:buNone/>
+                        <a:tabLst/>
+                        <a:defRPr/>
                       </a:pPr>
                       <a:r>
                         <a:rPr lang="en-US" sz="1400" b="1" dirty="0">
@@ -1591,11 +1520,25 @@
                             <a:srgbClr val="000000"/>
                           </a:solidFill>
                         </a:rPr>
-                        <a:t>Contextual predictors</a:t>
-                      </a:r>
-                    </a:p>
-                  </a:txBody>
-                  <a:tcPr marL="63500" marR="63500" marT="38100" marB="38100">
+                        <a:t>NVDRS-RAD</a:t>
+                      </a:r>
+                      <a:endParaRPr lang="en-US" sz="1400" dirty="0"/>
+                    </a:p>
+                    <a:p>
+                      <a:pPr marL="0" indent="0" algn="ctr">
+                        <a:buNone/>
+                      </a:pPr>
+                      <a:r>
+                        <a:rPr lang="en-US" sz="1400" b="1" dirty="0">
+                          <a:solidFill>
+                            <a:srgbClr val="000000"/>
+                          </a:solidFill>
+                        </a:rPr>
+                        <a:t>Narrative text</a:t>
+                      </a:r>
+                    </a:p>
+                  </a:txBody>
+                  <a:tcPr marL="63500" marR="63500" marT="38100" marB="38100" anchor="ctr">
                     <a:lnL w="12700" cap="flat" cmpd="sng" algn="ctr">
                       <a:solidFill>
                         <a:srgbClr val="000000"/>
@@ -1648,12 +1591,12 @@
                             <a:srgbClr val="000000"/>
                           </a:solidFill>
                         </a:rPr>
-                        <a:t>76 contextual predictors assembled from 26 data sources across 4 domains: demographic/environmental, socioeconomic/structural, social/community, and individual-level risk factors. Includes Census, BRFSS, and other public-use sources.</a:t>
+                        <a:t>NVDRS-RAD qualitative text narratives from original medical examiner, coroner, and law enforcement reports — provide critical context for mechanistic classification.</a:t>
                       </a:r>
                       <a:endParaRPr lang="en-US" sz="1400" dirty="0"/>
                     </a:p>
                   </a:txBody>
-                  <a:tcPr marL="63500" marR="63500" marT="38100" marB="38100">
+                  <a:tcPr marL="63500" marR="63500" marT="38100" marB="38100" anchor="ctr">
                     <a:lnL w="12700" cap="flat" cmpd="sng" algn="ctr">
                       <a:solidFill>
                         <a:srgbClr val="000000"/>
@@ -1694,7 +1637,7 @@
                 </a:tc>
                 <a:extLst>
                   <a:ext uri="{0D108BD9-81ED-4DB2-BD59-A6C34878D82A}">
-                    <a16:rowId xmlns:a16="http://schemas.microsoft.com/office/drawing/2014/main" val="10004"/>
+                    <a16:rowId xmlns:a16="http://schemas.microsoft.com/office/drawing/2014/main" val="1285255532"/>
                   </a:ext>
                 </a:extLst>
               </a:tr>
@@ -1713,11 +1656,11 @@
                             <a:srgbClr val="000000"/>
                           </a:solidFill>
                         </a:rPr>
-                        <a:t>Narrative text</a:t>
-                      </a:r>
-                    </a:p>
-                  </a:txBody>
-                  <a:tcPr marL="63500" marR="63500" marT="38100" marB="38100">
+                        <a:t>Contextual predictors</a:t>
+                      </a:r>
+                    </a:p>
+                  </a:txBody>
+                  <a:tcPr marL="63500" marR="63500" marT="38100" marB="38100" anchor="ctr">
                     <a:lnL w="12700" cap="flat" cmpd="sng" algn="ctr">
                       <a:solidFill>
                         <a:srgbClr val="000000"/>
@@ -1770,12 +1713,12 @@
                             <a:srgbClr val="000000"/>
                           </a:solidFill>
                         </a:rPr>
-                        <a:t>NVDRS-RAD qualitative text narratives from original medical examiner, coroner, and law enforcement reports — provide critical context for mechanistic classification.</a:t>
+                        <a:t>76 contextual predictors assembled from 26 data sources across 4 domains: demographic/environmental, socioeconomic/structural, social/community, and individual-level risk factors. Includes Census, BRFSS, and other public-use sources.</a:t>
                       </a:r>
                       <a:endParaRPr lang="en-US" sz="1400" dirty="0"/>
                     </a:p>
                   </a:txBody>
-                  <a:tcPr marL="63500" marR="63500" marT="38100" marB="38100">
+                  <a:tcPr marL="63500" marR="63500" marT="38100" marB="38100" anchor="ctr">
                     <a:lnL w="12700" cap="flat" cmpd="sng" algn="ctr">
                       <a:solidFill>
                         <a:srgbClr val="000000"/>
@@ -1816,7 +1759,7 @@
                 </a:tc>
                 <a:extLst>
                   <a:ext uri="{0D108BD9-81ED-4DB2-BD59-A6C34878D82A}">
-                    <a16:rowId xmlns:a16="http://schemas.microsoft.com/office/drawing/2014/main" val="10005"/>
+                    <a16:rowId xmlns:a16="http://schemas.microsoft.com/office/drawing/2014/main" val="10004"/>
                   </a:ext>
                 </a:extLst>
               </a:tr>
@@ -1825,6 +1768,36 @@
         </a:graphic>
       </p:graphicFrame>
     </p:spTree>
+  </p:cSld>
+  <p:clrMapOvr>
+    <a:masterClrMapping/>
+  </p:clrMapOvr>
+</p:sld>
+</file>
+
+<file path=ppt/slides/slide10.xml><?xml version="1.0" encoding="utf-8"?>
+<p:sld xmlns:a="http://schemas.openxmlformats.org/drawingml/2006/main" xmlns:r="http://schemas.openxmlformats.org/officeDocument/2006/relationships" xmlns:p="http://schemas.openxmlformats.org/presentationml/2006/main">
+  <p:cSld>
+    <p:spTree>
+      <p:nvGrpSpPr>
+        <p:cNvPr id="1" name=""/>
+        <p:cNvGrpSpPr/>
+        <p:nvPr/>
+      </p:nvGrpSpPr>
+      <p:grpSpPr>
+        <a:xfrm>
+          <a:off x="0" y="0"/>
+          <a:ext cx="0" cy="0"/>
+          <a:chOff x="0" y="0"/>
+          <a:chExt cx="0" cy="0"/>
+        </a:xfrm>
+      </p:grpSpPr>
+    </p:spTree>
+    <p:extLst>
+      <p:ext uri="{BB962C8B-B14F-4D97-AF65-F5344CB8AC3E}">
+        <p14:creationId xmlns:p14="http://schemas.microsoft.com/office/powerpoint/2010/main" val="3199866120"/>
+      </p:ext>
+    </p:extLst>
   </p:cSld>
   <p:clrMapOvr>
     <a:masterClrMapping/>
@@ -9050,7 +9023,7 @@
               <a:buNone/>
             </a:pPr>
             <a:r>
-              <a:rPr lang="en-US" sz="2400" b="1" dirty="0">
+              <a:rPr lang="en-US" sz="2400" b="1" u="sng" dirty="0">
                 <a:solidFill>
                   <a:schemeClr val="accent1"/>
                 </a:solidFill>
@@ -9084,28 +9057,21 @@
           <p:nvPr>
             <p:extLst>
               <p:ext uri="{D42A27DB-BD31-4B8C-83A1-F6EECF244321}">
-                <p14:modId xmlns:p14="http://schemas.microsoft.com/office/powerpoint/2010/main" val="1062193120"/>
+                <p14:modId xmlns:p14="http://schemas.microsoft.com/office/powerpoint/2010/main" val="3245830957"/>
               </p:ext>
             </p:extLst>
           </p:nvPr>
         </p:nvGraphicFramePr>
         <p:xfrm>
           <a:off x="1193205" y="1538557"/>
-          <a:ext cx="9969374" cy="2088045"/>
+          <a:ext cx="9347031" cy="2088045"/>
         </p:xfrm>
         <a:graphic>
           <a:graphicData uri="http://schemas.openxmlformats.org/drawingml/2006/table">
             <a:tbl>
               <a:tblPr/>
               <a:tblGrid>
-                <a:gridCol w="281515">
-                  <a:extLst>
-                    <a:ext uri="{9D8B030D-6E8A-4147-A177-3AD203B41FA5}">
-                      <a16:colId xmlns:a16="http://schemas.microsoft.com/office/drawing/2014/main" val="20000"/>
-                    </a:ext>
-                  </a:extLst>
-                </a:gridCol>
-                <a:gridCol w="4572438">
+                <a:gridCol w="4231610">
                   <a:extLst>
                     <a:ext uri="{9D8B030D-6E8A-4147-A177-3AD203B41FA5}">
                       <a16:colId xmlns:a16="http://schemas.microsoft.com/office/drawing/2014/main" val="20001"/>
@@ -9133,67 +9099,6 @@
                     <a:bodyPr/>
                     <a:lstStyle/>
                     <a:p>
-                      <a:pPr marL="0" indent="0" algn="ctr">
-                        <a:buNone/>
-                      </a:pPr>
-                      <a:r>
-                        <a:rPr lang="en-US" sz="1400" b="1" dirty="0">
-                          <a:solidFill>
-                            <a:srgbClr val="000000"/>
-                          </a:solidFill>
-                        </a:rPr>
-                        <a:t>#</a:t>
-                      </a:r>
-                      <a:endParaRPr lang="en-US" sz="1400" dirty="0"/>
-                    </a:p>
-                  </a:txBody>
-                  <a:tcPr marL="63500" marR="63500" marT="38100" marB="38100" anchor="ctr">
-                    <a:lnL w="12700" cap="flat" cmpd="sng" algn="ctr">
-                      <a:solidFill>
-                        <a:srgbClr val="000000"/>
-                      </a:solidFill>
-                      <a:prstDash val="solid"/>
-                      <a:round/>
-                      <a:headEnd type="none" w="med" len="med"/>
-                      <a:tailEnd type="none" w="med" len="med"/>
-                    </a:lnL>
-                    <a:lnR w="12700" cap="flat" cmpd="sng" algn="ctr">
-                      <a:solidFill>
-                        <a:srgbClr val="000000"/>
-                      </a:solidFill>
-                      <a:prstDash val="solid"/>
-                      <a:round/>
-                      <a:headEnd type="none" w="med" len="med"/>
-                      <a:tailEnd type="none" w="med" len="med"/>
-                    </a:lnR>
-                    <a:lnT w="12700" cap="flat" cmpd="sng" algn="ctr">
-                      <a:solidFill>
-                        <a:srgbClr val="000000"/>
-                      </a:solidFill>
-                      <a:prstDash val="solid"/>
-                      <a:round/>
-                      <a:headEnd type="none" w="med" len="med"/>
-                      <a:tailEnd type="none" w="med" len="med"/>
-                    </a:lnT>
-                    <a:lnB w="12700" cap="flat" cmpd="sng" algn="ctr">
-                      <a:solidFill>
-                        <a:srgbClr val="000000"/>
-                      </a:solidFill>
-                      <a:prstDash val="solid"/>
-                      <a:round/>
-                      <a:headEnd type="none" w="med" len="med"/>
-                      <a:tailEnd type="none" w="med" len="med"/>
-                    </a:lnB>
-                    <a:solidFill>
-                      <a:srgbClr val="FFFFFF"/>
-                    </a:solidFill>
-                  </a:tcPr>
-                </a:tc>
-                <a:tc>
-                  <a:txBody>
-                    <a:bodyPr/>
-                    <a:lstStyle/>
-                    <a:p>
                       <a:pPr marL="0" indent="0">
                         <a:buNone/>
                       </a:pPr>
@@ -9379,60 +9284,6 @@
                 </a:extLst>
               </a:tr>
               <a:tr h="852616">
-                <a:tc>
-                  <a:txBody>
-                    <a:bodyPr/>
-                    <a:lstStyle/>
-                    <a:p>
-                      <a:pPr marL="0" indent="0" algn="ctr">
-                        <a:buNone/>
-                      </a:pPr>
-                      <a:r>
-                        <a:rPr lang="en-US" sz="1400" b="1" dirty="0"/>
-                        <a:t>1</a:t>
-                      </a:r>
-                      <a:endParaRPr lang="en-US" sz="1400" dirty="0"/>
-                    </a:p>
-                  </a:txBody>
-                  <a:tcPr marL="63500" marR="63500" marT="38100" marB="38100">
-                    <a:lnL w="12700" cap="flat" cmpd="sng" algn="ctr">
-                      <a:solidFill>
-                        <a:srgbClr val="000000"/>
-                      </a:solidFill>
-                      <a:prstDash val="solid"/>
-                      <a:round/>
-                      <a:headEnd type="none" w="med" len="med"/>
-                      <a:tailEnd type="none" w="med" len="med"/>
-                    </a:lnL>
-                    <a:lnR w="12700" cap="flat" cmpd="sng" algn="ctr">
-                      <a:solidFill>
-                        <a:srgbClr val="000000"/>
-                      </a:solidFill>
-                      <a:prstDash val="solid"/>
-                      <a:round/>
-                      <a:headEnd type="none" w="med" len="med"/>
-                      <a:tailEnd type="none" w="med" len="med"/>
-                    </a:lnR>
-                    <a:lnT w="12700" cap="flat" cmpd="sng" algn="ctr">
-                      <a:solidFill>
-                        <a:srgbClr val="000000"/>
-                      </a:solidFill>
-                      <a:prstDash val="solid"/>
-                      <a:round/>
-                      <a:headEnd type="none" w="med" len="med"/>
-                      <a:tailEnd type="none" w="med" len="med"/>
-                    </a:lnT>
-                    <a:lnB w="12700" cap="flat" cmpd="sng" algn="ctr">
-                      <a:solidFill>
-                        <a:srgbClr val="000000"/>
-                      </a:solidFill>
-                      <a:prstDash val="solid"/>
-                      <a:round/>
-                      <a:headEnd type="none" w="med" len="med"/>
-                      <a:tailEnd type="none" w="med" len="med"/>
-                    </a:lnB>
-                  </a:tcPr>
-                </a:tc>
                 <a:tc>
                   <a:txBody>
                     <a:bodyPr/>
@@ -9679,60 +9530,6 @@
                 </a:extLst>
               </a:tr>
               <a:tr h="284452">
-                <a:tc>
-                  <a:txBody>
-                    <a:bodyPr/>
-                    <a:lstStyle/>
-                    <a:p>
-                      <a:pPr marL="0" indent="0" algn="ctr">
-                        <a:buNone/>
-                      </a:pPr>
-                      <a:r>
-                        <a:rPr lang="en-US" sz="1400" b="1" dirty="0"/>
-                        <a:t>2</a:t>
-                      </a:r>
-                      <a:endParaRPr lang="en-US" sz="1400" dirty="0"/>
-                    </a:p>
-                  </a:txBody>
-                  <a:tcPr marL="63500" marR="63500" marT="38100" marB="38100">
-                    <a:lnL w="12700" cap="flat" cmpd="sng" algn="ctr">
-                      <a:solidFill>
-                        <a:srgbClr val="000000"/>
-                      </a:solidFill>
-                      <a:prstDash val="solid"/>
-                      <a:round/>
-                      <a:headEnd type="none" w="med" len="med"/>
-                      <a:tailEnd type="none" w="med" len="med"/>
-                    </a:lnL>
-                    <a:lnR w="12700" cap="flat" cmpd="sng" algn="ctr">
-                      <a:solidFill>
-                        <a:srgbClr val="000000"/>
-                      </a:solidFill>
-                      <a:prstDash val="solid"/>
-                      <a:round/>
-                      <a:headEnd type="none" w="med" len="med"/>
-                      <a:tailEnd type="none" w="med" len="med"/>
-                    </a:lnR>
-                    <a:lnT w="12700" cap="flat" cmpd="sng" algn="ctr">
-                      <a:solidFill>
-                        <a:srgbClr val="000000"/>
-                      </a:solidFill>
-                      <a:prstDash val="solid"/>
-                      <a:round/>
-                      <a:headEnd type="none" w="med" len="med"/>
-                      <a:tailEnd type="none" w="med" len="med"/>
-                    </a:lnT>
-                    <a:lnB w="12700" cap="flat" cmpd="sng" algn="ctr">
-                      <a:solidFill>
-                        <a:srgbClr val="000000"/>
-                      </a:solidFill>
-                      <a:prstDash val="solid"/>
-                      <a:round/>
-                      <a:headEnd type="none" w="med" len="med"/>
-                      <a:tailEnd type="none" w="med" len="med"/>
-                    </a:lnB>
-                  </a:tcPr>
-                </a:tc>
                 <a:tc>
                   <a:txBody>
                     <a:bodyPr/>
@@ -9980,7 +9777,7 @@
           <a:lstStyle/>
           <a:p>
             <a:r>
-              <a:rPr lang="en-US" sz="2400" b="1" dirty="0">
+              <a:rPr lang="en-US" sz="2400" b="1" u="sng" dirty="0">
                 <a:solidFill>
                   <a:schemeClr val="accent1"/>
                 </a:solidFill>
@@ -10014,28 +9811,21 @@
           <p:nvPr>
             <p:extLst>
               <p:ext uri="{D42A27DB-BD31-4B8C-83A1-F6EECF244321}">
-                <p14:modId xmlns:p14="http://schemas.microsoft.com/office/powerpoint/2010/main" val="2956625822"/>
+                <p14:modId xmlns:p14="http://schemas.microsoft.com/office/powerpoint/2010/main" val="3669576411"/>
               </p:ext>
             </p:extLst>
           </p:nvPr>
         </p:nvGraphicFramePr>
         <p:xfrm>
           <a:off x="201168" y="1187484"/>
-          <a:ext cx="11777472" cy="5151120"/>
+          <a:ext cx="11276275" cy="4968240"/>
         </p:xfrm>
         <a:graphic>
           <a:graphicData uri="http://schemas.openxmlformats.org/drawingml/2006/table">
             <a:tbl>
               <a:tblPr/>
               <a:tblGrid>
-                <a:gridCol w="347472">
-                  <a:extLst>
-                    <a:ext uri="{9D8B030D-6E8A-4147-A177-3AD203B41FA5}">
-                      <a16:colId xmlns:a16="http://schemas.microsoft.com/office/drawing/2014/main" val="20000"/>
-                    </a:ext>
-                  </a:extLst>
-                </a:gridCol>
-                <a:gridCol w="4863619">
+                <a:gridCol w="4709894">
                   <a:extLst>
                     <a:ext uri="{9D8B030D-6E8A-4147-A177-3AD203B41FA5}">
                       <a16:colId xmlns:a16="http://schemas.microsoft.com/office/drawing/2014/main" val="20001"/>
@@ -10063,67 +9853,6 @@
                     <a:bodyPr/>
                     <a:lstStyle/>
                     <a:p>
-                      <a:pPr marL="0" indent="0" algn="ctr">
-                        <a:buNone/>
-                      </a:pPr>
-                      <a:r>
-                        <a:rPr lang="en-US" sz="1400" b="1" dirty="0">
-                          <a:solidFill>
-                            <a:srgbClr val="000000"/>
-                          </a:solidFill>
-                        </a:rPr>
-                        <a:t>#</a:t>
-                      </a:r>
-                      <a:endParaRPr lang="en-US" sz="1400" dirty="0"/>
-                    </a:p>
-                  </a:txBody>
-                  <a:tcPr marL="63500" marR="63500" marT="38100" marB="38100" anchor="ctr">
-                    <a:lnL w="12700" cap="flat" cmpd="sng" algn="ctr">
-                      <a:solidFill>
-                        <a:srgbClr val="000000"/>
-                      </a:solidFill>
-                      <a:prstDash val="solid"/>
-                      <a:round/>
-                      <a:headEnd type="none" w="med" len="med"/>
-                      <a:tailEnd type="none" w="med" len="med"/>
-                    </a:lnL>
-                    <a:lnR w="12700" cap="flat" cmpd="sng" algn="ctr">
-                      <a:solidFill>
-                        <a:srgbClr val="000000"/>
-                      </a:solidFill>
-                      <a:prstDash val="solid"/>
-                      <a:round/>
-                      <a:headEnd type="none" w="med" len="med"/>
-                      <a:tailEnd type="none" w="med" len="med"/>
-                    </a:lnR>
-                    <a:lnT w="12700" cap="flat" cmpd="sng" algn="ctr">
-                      <a:solidFill>
-                        <a:srgbClr val="000000"/>
-                      </a:solidFill>
-                      <a:prstDash val="solid"/>
-                      <a:round/>
-                      <a:headEnd type="none" w="med" len="med"/>
-                      <a:tailEnd type="none" w="med" len="med"/>
-                    </a:lnT>
-                    <a:lnB w="12700" cap="flat" cmpd="sng" algn="ctr">
-                      <a:solidFill>
-                        <a:srgbClr val="000000"/>
-                      </a:solidFill>
-                      <a:prstDash val="solid"/>
-                      <a:round/>
-                      <a:headEnd type="none" w="med" len="med"/>
-                      <a:tailEnd type="none" w="med" len="med"/>
-                    </a:lnB>
-                    <a:solidFill>
-                      <a:srgbClr val="FFFFFF"/>
-                    </a:solidFill>
-                  </a:tcPr>
-                </a:tc>
-                <a:tc>
-                  <a:txBody>
-                    <a:bodyPr/>
-                    <a:lstStyle/>
-                    <a:p>
                       <a:pPr marL="0" indent="0">
                         <a:buNone/>
                       </a:pPr>
@@ -10309,60 +10038,6 @@
                 </a:extLst>
               </a:tr>
               <a:tr h="931853">
-                <a:tc>
-                  <a:txBody>
-                    <a:bodyPr/>
-                    <a:lstStyle/>
-                    <a:p>
-                      <a:pPr marL="0" indent="0" algn="ctr">
-                        <a:buNone/>
-                      </a:pPr>
-                      <a:r>
-                        <a:rPr lang="en-US" sz="1400" b="1" dirty="0"/>
-                        <a:t>3</a:t>
-                      </a:r>
-                      <a:endParaRPr lang="en-US" sz="1400" dirty="0"/>
-                    </a:p>
-                  </a:txBody>
-                  <a:tcPr marL="63500" marR="63500" marT="38100" marB="38100">
-                    <a:lnL w="12700" cap="flat" cmpd="sng" algn="ctr">
-                      <a:solidFill>
-                        <a:srgbClr val="000000"/>
-                      </a:solidFill>
-                      <a:prstDash val="solid"/>
-                      <a:round/>
-                      <a:headEnd type="none" w="med" len="med"/>
-                      <a:tailEnd type="none" w="med" len="med"/>
-                    </a:lnL>
-                    <a:lnR w="12700" cap="flat" cmpd="sng" algn="ctr">
-                      <a:solidFill>
-                        <a:srgbClr val="000000"/>
-                      </a:solidFill>
-                      <a:prstDash val="solid"/>
-                      <a:round/>
-                      <a:headEnd type="none" w="med" len="med"/>
-                      <a:tailEnd type="none" w="med" len="med"/>
-                    </a:lnR>
-                    <a:lnT w="12700" cap="flat" cmpd="sng" algn="ctr">
-                      <a:solidFill>
-                        <a:srgbClr val="000000"/>
-                      </a:solidFill>
-                      <a:prstDash val="solid"/>
-                      <a:round/>
-                      <a:headEnd type="none" w="med" len="med"/>
-                      <a:tailEnd type="none" w="med" len="med"/>
-                    </a:lnT>
-                    <a:lnB w="12700" cap="flat" cmpd="sng" algn="ctr">
-                      <a:solidFill>
-                        <a:srgbClr val="000000"/>
-                      </a:solidFill>
-                      <a:prstDash val="solid"/>
-                      <a:round/>
-                      <a:headEnd type="none" w="med" len="med"/>
-                      <a:tailEnd type="none" w="med" len="med"/>
-                    </a:lnB>
-                  </a:tcPr>
-                </a:tc>
                 <a:tc>
                   <a:txBody>
                     <a:bodyPr/>
@@ -10391,11 +10066,15 @@
                       </a:r>
                       <a:r>
                         <a:rPr lang="en-US" sz="1400" dirty="0"/>
-                        <a:t>Statistical; spatiotemporal autocorrelation; county &amp; state-level</a:t>
+                        <a:t>Statistical; county &amp; state-level</a:t>
                       </a:r>
                       <a:br>
                         <a:rPr lang="en-US" sz="1400" dirty="0"/>
                       </a:br>
+                      <a:r>
+                        <a:rPr lang="en-US" sz="1400" dirty="0"/>
+                        <a:t>- </a:t>
+                      </a:r>
                       <a:r>
                         <a:rPr lang="en-US" sz="1400" b="1" dirty="0">
                           <a:solidFill>
@@ -10413,6 +10092,45 @@
                           <a:ea typeface="+mn-ea"/>
                           <a:cs typeface="+mn-cs"/>
                         </a:rPr>
+                        <a:t>– temporal</a:t>
+                      </a:r>
+                    </a:p>
+                    <a:p>
+                      <a:pPr marL="0" marR="0" lvl="0" indent="0" algn="l" defTabSz="914400" rtl="0" eaLnBrk="1" fontAlgn="auto" latinLnBrk="0" hangingPunct="1">
+                        <a:lnSpc>
+                          <a:spcPct val="100000"/>
+                        </a:lnSpc>
+                        <a:spcBef>
+                          <a:spcPts val="0"/>
+                        </a:spcBef>
+                        <a:spcAft>
+                          <a:spcPts val="0"/>
+                        </a:spcAft>
+                        <a:buClrTx/>
+                        <a:buSzTx/>
+                        <a:buFontTx/>
+                        <a:buNone/>
+                        <a:tabLst/>
+                        <a:defRPr/>
+                      </a:pPr>
+                      <a:r>
+                        <a:rPr lang="en-US" sz="1400" b="1" dirty="0"/>
+                        <a:t>- </a:t>
+                      </a:r>
+                      <a:r>
+                        <a:rPr lang="en-US" sz="1400" b="1" dirty="0">
+                          <a:solidFill>
+                            <a:srgbClr val="7030A0"/>
+                          </a:solidFill>
+                        </a:rPr>
+                        <a:t>ARIMA/transfer function </a:t>
+                      </a:r>
+                      <a:r>
+                        <a:rPr lang="en-US" sz="1400" b="1" dirty="0"/>
+                        <a:t>models  </a:t>
+                      </a:r>
+                      <a:r>
+                        <a:rPr lang="en-US" sz="1400" dirty="0"/>
                         <a:t>- temporal</a:t>
                       </a:r>
                       <a:br>
@@ -10423,13 +10141,60 @@
                         </a:rPr>
                       </a:br>
                       <a:r>
-                        <a:rPr lang="en-US" sz="1400" b="1" dirty="0"/>
-                        <a:t>Conditional Autoregressive (CAR)</a:t>
+                        <a:rPr lang="en-US" sz="1400" b="1" dirty="0">
+                          <a:solidFill>
+                            <a:schemeClr val="accent4">
+                              <a:lumMod val="50000"/>
+                            </a:schemeClr>
+                          </a:solidFill>
+                        </a:rPr>
+                        <a:t>- </a:t>
+                      </a:r>
+                      <a:r>
+                        <a:rPr lang="en-US" sz="1400" b="1" dirty="0">
+                          <a:solidFill>
+                            <a:schemeClr val="accent4">
+                              <a:lumMod val="75000"/>
+                            </a:schemeClr>
+                          </a:solidFill>
+                        </a:rPr>
+                        <a:t>Conditional Autoregressive (CAR) -</a:t>
+                      </a:r>
+                      <a:r>
+                        <a:rPr lang="en-US" sz="1400" b="0" dirty="0">
+                          <a:solidFill>
+                            <a:schemeClr val="accent4">
+                              <a:lumMod val="75000"/>
+                            </a:schemeClr>
+                          </a:solidFill>
+                        </a:rPr>
+                        <a:t> </a:t>
+                      </a:r>
+                      <a:r>
+                        <a:rPr lang="en-US" sz="1400" b="1" kern="1200" dirty="0">
+                          <a:solidFill>
+                            <a:schemeClr val="accent4">
+                              <a:lumMod val="75000"/>
+                            </a:schemeClr>
+                          </a:solidFill>
+                          <a:latin typeface="+mn-lt"/>
+                          <a:ea typeface="+mn-ea"/>
+                          <a:cs typeface="+mn-cs"/>
+                        </a:rPr>
+                        <a:t>ANOVA </a:t>
                       </a:r>
                       <a:r>
                         <a:rPr lang="en-US" sz="1400" b="0" dirty="0"/>
-                        <a:t> - spatial</a:t>
-                      </a:r>
+                        <a:t>- </a:t>
+                      </a:r>
+                      <a:r>
+                        <a:rPr lang="en-US" sz="1400" dirty="0"/>
+                        <a:t>spatiotemporal </a:t>
+                      </a:r>
+                      <a:br>
+                        <a:rPr lang="en-US" sz="1400" dirty="0"/>
+                      </a:br>
+                      <a:endParaRPr lang="en-US" sz="1400" b="0" dirty="0"/>
                     </a:p>
                   </a:txBody>
                   <a:tcPr marL="63500" marR="63500" marT="38100" marB="38100">
@@ -10569,7 +10334,7 @@
                         <a:buNone/>
                       </a:pPr>
                       <a:r>
-                        <a:rPr lang="en-US" sz="1400" u="sng" dirty="0">
+                        <a:rPr lang="en-US" sz="1200" u="sng" dirty="0">
                           <a:solidFill>
                             <a:srgbClr val="0563C1"/>
                           </a:solidFill>
@@ -10584,12 +10349,20 @@
                         <a:t>Kandula et al. (2023)</a:t>
                       </a:r>
                       <a:r>
-                        <a:rPr lang="en-US" sz="1400" dirty="0"/>
-                        <a:t> — County-level suicide mortality modelling
+                        <a:rPr lang="en-US" sz="1200" dirty="0"/>
+                        <a:t> — County-level suicide mortality modelling – </a:t>
+                      </a:r>
+                      <a:r>
+                        <a:rPr lang="en-US" sz="1200" b="1" dirty="0"/>
+                        <a:t>CAR/ANOVA</a:t>
+                      </a:r>
+                      <a:r>
+                        <a:rPr lang="en-US" sz="1200" dirty="0"/>
+                        <a:t>
 </a:t>
                       </a:r>
                       <a:r>
-                        <a:rPr lang="en-US" sz="1400" u="sng" dirty="0">
+                        <a:rPr lang="en-US" sz="1200" u="sng" dirty="0">
                           <a:solidFill>
                             <a:srgbClr val="0563C1"/>
                           </a:solidFill>
@@ -10604,12 +10377,20 @@
                         <a:t>Kandula et al. (2023b)</a:t>
                       </a:r>
                       <a:r>
-                        <a:rPr lang="en-US" sz="1400" dirty="0"/>
-                        <a:t> — Hindcasts and forecasts of suicide mortality
+                        <a:rPr lang="en-US" sz="1200" dirty="0"/>
+                        <a:t> — Hindcasts and forecasts of suicide mortality -- </a:t>
+                      </a:r>
+                      <a:r>
+                        <a:rPr lang="en-US" sz="1200" b="1" dirty="0"/>
+                        <a:t>ARIMA</a:t>
+                      </a:r>
+                      <a:r>
+                        <a:rPr lang="en-US" sz="1200" dirty="0"/>
+                        <a:t>
 </a:t>
                       </a:r>
                       <a:r>
-                        <a:rPr lang="en-US" sz="1400" u="sng" dirty="0">
+                        <a:rPr lang="en-US" sz="1200" u="sng" dirty="0">
                           <a:solidFill>
                             <a:srgbClr val="0563C1"/>
                           </a:solidFill>
@@ -10624,8 +10405,16 @@
                         <a:t>Gimbrone et al.</a:t>
                       </a:r>
                       <a:r>
-                        <a:rPr lang="en-US" sz="1400" dirty="0"/>
-                        <a:t> — Prior use of CAR models for suicide risk estimation</a:t>
+                        <a:rPr lang="en-US" sz="1200" dirty="0"/>
+                        <a:t> —</a:t>
+                      </a:r>
+                      <a:r>
+                        <a:rPr lang="en-US" sz="1200" b="1" dirty="0"/>
+                        <a:t>ARIMA/transfer function </a:t>
+                      </a:r>
+                      <a:r>
+                        <a:rPr lang="en-US" sz="1200" dirty="0"/>
+                        <a:t>models for suicide risk estimation</a:t>
                       </a:r>
                     </a:p>
                   </a:txBody>
@@ -10680,60 +10469,6 @@
                     <a:bodyPr/>
                     <a:lstStyle/>
                     <a:p>
-                      <a:pPr marL="0" indent="0" algn="ctr">
-                        <a:buNone/>
-                      </a:pPr>
-                      <a:r>
-                        <a:rPr lang="en-US" sz="1400" b="1" dirty="0"/>
-                        <a:t>4</a:t>
-                      </a:r>
-                      <a:endParaRPr lang="en-US" sz="1400" dirty="0"/>
-                    </a:p>
-                  </a:txBody>
-                  <a:tcPr marL="63500" marR="63500" marT="38100" marB="38100">
-                    <a:lnL w="12700" cap="flat" cmpd="sng" algn="ctr">
-                      <a:solidFill>
-                        <a:srgbClr val="000000"/>
-                      </a:solidFill>
-                      <a:prstDash val="solid"/>
-                      <a:round/>
-                      <a:headEnd type="none" w="med" len="med"/>
-                      <a:tailEnd type="none" w="med" len="med"/>
-                    </a:lnL>
-                    <a:lnR w="12700" cap="flat" cmpd="sng" algn="ctr">
-                      <a:solidFill>
-                        <a:srgbClr val="000000"/>
-                      </a:solidFill>
-                      <a:prstDash val="solid"/>
-                      <a:round/>
-                      <a:headEnd type="none" w="med" len="med"/>
-                      <a:tailEnd type="none" w="med" len="med"/>
-                    </a:lnR>
-                    <a:lnT w="12700" cap="flat" cmpd="sng" algn="ctr">
-                      <a:solidFill>
-                        <a:srgbClr val="000000"/>
-                      </a:solidFill>
-                      <a:prstDash val="solid"/>
-                      <a:round/>
-                      <a:headEnd type="none" w="med" len="med"/>
-                      <a:tailEnd type="none" w="med" len="med"/>
-                    </a:lnT>
-                    <a:lnB w="12700" cap="flat" cmpd="sng" algn="ctr">
-                      <a:solidFill>
-                        <a:srgbClr val="000000"/>
-                      </a:solidFill>
-                      <a:prstDash val="solid"/>
-                      <a:round/>
-                      <a:headEnd type="none" w="med" len="med"/>
-                      <a:tailEnd type="none" w="med" len="med"/>
-                    </a:lnB>
-                  </a:tcPr>
-                </a:tc>
-                <a:tc>
-                  <a:txBody>
-                    <a:bodyPr/>
-                    <a:lstStyle/>
-                    <a:p>
                       <a:pPr marL="0" indent="0">
                         <a:buNone/>
                       </a:pPr>
@@ -10880,7 +10615,7 @@
                         <a:buNone/>
                       </a:pPr>
                       <a:r>
-                        <a:rPr lang="en-US" sz="1400" u="sng" dirty="0">
+                        <a:rPr lang="en-US" sz="1200" u="sng" dirty="0">
                           <a:solidFill>
                             <a:srgbClr val="0563C1"/>
                           </a:solidFill>
@@ -10895,7 +10630,7 @@
                         <a:t>Ke et al.</a:t>
                       </a:r>
                       <a:r>
-                        <a:rPr lang="en-US" sz="1400" dirty="0"/>
+                        <a:rPr lang="en-US" sz="1200" dirty="0"/>
                         <a:t> — Demonstrated strong performance in time-series forecasting</a:t>
                       </a:r>
                     </a:p>
@@ -10951,60 +10686,6 @@
                     <a:bodyPr/>
                     <a:lstStyle/>
                     <a:p>
-                      <a:pPr marL="0" indent="0" algn="ctr">
-                        <a:buNone/>
-                      </a:pPr>
-                      <a:r>
-                        <a:rPr lang="en-US" sz="1400" b="1" dirty="0"/>
-                        <a:t>5</a:t>
-                      </a:r>
-                      <a:endParaRPr lang="en-US" sz="1400" dirty="0"/>
-                    </a:p>
-                  </a:txBody>
-                  <a:tcPr marL="63500" marR="63500" marT="38100" marB="38100">
-                    <a:lnL w="12700" cap="flat" cmpd="sng" algn="ctr">
-                      <a:solidFill>
-                        <a:srgbClr val="000000"/>
-                      </a:solidFill>
-                      <a:prstDash val="solid"/>
-                      <a:round/>
-                      <a:headEnd type="none" w="med" len="med"/>
-                      <a:tailEnd type="none" w="med" len="med"/>
-                    </a:lnL>
-                    <a:lnR w="12700" cap="flat" cmpd="sng" algn="ctr">
-                      <a:solidFill>
-                        <a:srgbClr val="000000"/>
-                      </a:solidFill>
-                      <a:prstDash val="solid"/>
-                      <a:round/>
-                      <a:headEnd type="none" w="med" len="med"/>
-                      <a:tailEnd type="none" w="med" len="med"/>
-                    </a:lnR>
-                    <a:lnT w="12700" cap="flat" cmpd="sng" algn="ctr">
-                      <a:solidFill>
-                        <a:srgbClr val="000000"/>
-                      </a:solidFill>
-                      <a:prstDash val="solid"/>
-                      <a:round/>
-                      <a:headEnd type="none" w="med" len="med"/>
-                      <a:tailEnd type="none" w="med" len="med"/>
-                    </a:lnT>
-                    <a:lnB w="12700" cap="flat" cmpd="sng" algn="ctr">
-                      <a:solidFill>
-                        <a:srgbClr val="000000"/>
-                      </a:solidFill>
-                      <a:prstDash val="solid"/>
-                      <a:round/>
-                      <a:headEnd type="none" w="med" len="med"/>
-                      <a:tailEnd type="none" w="med" len="med"/>
-                    </a:lnB>
-                  </a:tcPr>
-                </a:tc>
-                <a:tc>
-                  <a:txBody>
-                    <a:bodyPr/>
-                    <a:lstStyle/>
-                    <a:p>
                       <a:pPr marL="0" indent="0">
                         <a:buNone/>
                       </a:pPr>
@@ -11198,7 +10879,7 @@
                         <a:buNone/>
                       </a:pPr>
                       <a:r>
-                        <a:rPr lang="en-US" sz="1400" u="sng" dirty="0">
+                        <a:rPr lang="en-US" sz="1200" u="sng" dirty="0">
                           <a:solidFill>
                             <a:srgbClr val="0563C1"/>
                           </a:solidFill>
@@ -11213,7 +10894,7 @@
                         <a:t>Santangelo et al.</a:t>
                       </a:r>
                       <a:r>
-                        <a:rPr lang="en-US" sz="1400" dirty="0"/>
+                        <a:rPr lang="en-US" sz="1200" dirty="0"/>
                         <a:t> — ML for infectious disease forecasting and non-linear relationships</a:t>
                       </a:r>
                     </a:p>
@@ -11269,14 +10950,23 @@
                     <a:bodyPr/>
                     <a:lstStyle/>
                     <a:p>
-                      <a:pPr marL="0" indent="0" algn="ctr">
+                      <a:pPr marL="0" indent="0">
                         <a:buNone/>
                       </a:pPr>
                       <a:r>
                         <a:rPr lang="en-US" sz="1400" b="1" dirty="0"/>
-                        <a:t>6</a:t>
+                        <a:t>Mathematical Contagion Model + EAKF</a:t>
                       </a:r>
                       <a:endParaRPr lang="en-US" sz="1400" dirty="0"/>
+                    </a:p>
+                    <a:p>
+                      <a:pPr marL="0" indent="0">
+                        <a:buNone/>
+                      </a:pPr>
+                      <a:r>
+                        <a:rPr lang="en-US" sz="1400" dirty="0"/>
+                        <a:t>Dynamical systems; Bayesian data assimilation; real-time parameter optimization; epidemic-style forecasting</a:t>
+                      </a:r>
                     </a:p>
                   </a:txBody>
                   <a:tcPr marL="63500" marR="63500" marT="38100" marB="38100">
@@ -11327,10 +11017,9 @@
                         <a:buNone/>
                       </a:pPr>
                       <a:r>
-                        <a:rPr lang="en-US" sz="1400" b="1" dirty="0"/>
-                        <a:t>Mathematical Contagion Model + EAKF</a:t>
-                      </a:r>
-                      <a:endParaRPr lang="en-US" sz="1400" dirty="0"/>
+                        <a:rPr lang="en-US" sz="1400" dirty="0"/>
+                        <a:t>SEDD (assimilated)</a:t>
+                      </a:r>
                     </a:p>
                     <a:p>
                       <a:pPr marL="0" indent="0">
@@ -11338,7 +11027,7 @@
                       </a:pPr>
                       <a:r>
                         <a:rPr lang="en-US" sz="1400" dirty="0"/>
-                        <a:t>Dynamical systems; Bayesian data assimilation; real-time parameter optimization; epidemic-style forecasting</a:t>
+                        <a:t>SID (assimilated)</a:t>
                       </a:r>
                     </a:p>
                   </a:txBody>
@@ -11390,69 +11079,7 @@
                         <a:buNone/>
                       </a:pPr>
                       <a:r>
-                        <a:rPr lang="en-US" sz="1400" dirty="0"/>
-                        <a:t>SEDD (assimilated)</a:t>
-                      </a:r>
-                    </a:p>
-                    <a:p>
-                      <a:pPr marL="0" indent="0">
-                        <a:buNone/>
-                      </a:pPr>
-                      <a:r>
-                        <a:rPr lang="en-US" sz="1400" dirty="0"/>
-                        <a:t>SID (assimilated)</a:t>
-                      </a:r>
-                    </a:p>
-                  </a:txBody>
-                  <a:tcPr marL="63500" marR="63500" marT="38100" marB="38100">
-                    <a:lnL w="12700" cap="flat" cmpd="sng" algn="ctr">
-                      <a:solidFill>
-                        <a:srgbClr val="000000"/>
-                      </a:solidFill>
-                      <a:prstDash val="solid"/>
-                      <a:round/>
-                      <a:headEnd type="none" w="med" len="med"/>
-                      <a:tailEnd type="none" w="med" len="med"/>
-                    </a:lnL>
-                    <a:lnR w="12700" cap="flat" cmpd="sng" algn="ctr">
-                      <a:solidFill>
-                        <a:srgbClr val="000000"/>
-                      </a:solidFill>
-                      <a:prstDash val="solid"/>
-                      <a:round/>
-                      <a:headEnd type="none" w="med" len="med"/>
-                      <a:tailEnd type="none" w="med" len="med"/>
-                    </a:lnR>
-                    <a:lnT w="12700" cap="flat" cmpd="sng" algn="ctr">
-                      <a:solidFill>
-                        <a:srgbClr val="000000"/>
-                      </a:solidFill>
-                      <a:prstDash val="solid"/>
-                      <a:round/>
-                      <a:headEnd type="none" w="med" len="med"/>
-                      <a:tailEnd type="none" w="med" len="med"/>
-                    </a:lnT>
-                    <a:lnB w="12700" cap="flat" cmpd="sng" algn="ctr">
-                      <a:solidFill>
-                        <a:srgbClr val="000000"/>
-                      </a:solidFill>
-                      <a:prstDash val="solid"/>
-                      <a:round/>
-                      <a:headEnd type="none" w="med" len="med"/>
-                      <a:tailEnd type="none" w="med" len="med"/>
-                    </a:lnB>
-                  </a:tcPr>
-                </a:tc>
-                <a:tc>
-                  <a:txBody>
-                    <a:bodyPr/>
-                    <a:lstStyle/>
-                    <a:p>
-                      <a:pPr marL="0" indent="0">
-                        <a:buNone/>
-                      </a:pPr>
-                      <a:r>
-                        <a:rPr lang="en-US" sz="1400" u="sng" dirty="0">
+                        <a:rPr lang="en-US" sz="1200" u="sng" dirty="0">
                           <a:solidFill>
                             <a:srgbClr val="0563C1"/>
                           </a:solidFill>
@@ -11467,7 +11094,7 @@
                         <a:t>Shaman et al. (2024)</a:t>
                       </a:r>
                       <a:r>
-                        <a:rPr lang="en-US" sz="1400" dirty="0"/>
+                        <a:rPr lang="en-US" sz="1200" dirty="0"/>
                         <a:t> — Prior structure simulating suicide ideation</a:t>
                       </a:r>
                     </a:p>
@@ -11523,14 +11150,23 @@
                     <a:bodyPr/>
                     <a:lstStyle/>
                     <a:p>
-                      <a:pPr marL="0" indent="0" algn="ctr">
+                      <a:pPr marL="0" indent="0">
                         <a:buNone/>
                       </a:pPr>
                       <a:r>
                         <a:rPr lang="en-US" sz="1400" b="1" dirty="0"/>
-                        <a:t>7</a:t>
+                        <a:t>Multi-Model Ensemble</a:t>
                       </a:r>
                       <a:endParaRPr lang="en-US" sz="1400" dirty="0"/>
+                    </a:p>
+                    <a:p>
+                      <a:pPr marL="0" indent="0">
+                        <a:buNone/>
+                      </a:pPr>
+                      <a:r>
+                        <a:rPr lang="en-US" sz="1400" dirty="0"/>
+                        <a:t>Combines outputs of statistical, LightGBM, NN, and dynamical models; corrects individual system biases</a:t>
+                      </a:r>
                     </a:p>
                   </a:txBody>
                   <a:tcPr marL="63500" marR="63500" marT="38100" marB="38100">
@@ -11581,10 +11217,9 @@
                         <a:buNone/>
                       </a:pPr>
                       <a:r>
-                        <a:rPr lang="en-US" sz="1400" b="1" dirty="0"/>
-                        <a:t>Multi-Model Ensemble</a:t>
-                      </a:r>
-                      <a:endParaRPr lang="en-US" sz="1400" dirty="0"/>
+                        <a:rPr lang="en-US" sz="1400" dirty="0"/>
+                        <a:t>Outputs of models #3–6</a:t>
+                      </a:r>
                     </a:p>
                     <a:p>
                       <a:pPr marL="0" indent="0">
@@ -11592,7 +11227,16 @@
                       </a:pPr>
                       <a:r>
                         <a:rPr lang="en-US" sz="1400" dirty="0"/>
-                        <a:t>Combines outputs of statistical, LightGBM, NN, and dynamical models; corrects individual system biases</a:t>
+                        <a:t>SID-SEDD</a:t>
+                      </a:r>
+                    </a:p>
+                    <a:p>
+                      <a:pPr marL="0" indent="0">
+                        <a:buNone/>
+                      </a:pPr>
+                      <a:r>
+                        <a:rPr lang="en-US" sz="1400" dirty="0"/>
+                        <a:t>76 contextual predictors</a:t>
                       </a:r>
                     </a:p>
                   </a:txBody>
@@ -11644,78 +11288,7 @@
                         <a:buNone/>
                       </a:pPr>
                       <a:r>
-                        <a:rPr lang="en-US" sz="1400" dirty="0"/>
-                        <a:t>Outputs of models #3–6</a:t>
-                      </a:r>
-                    </a:p>
-                    <a:p>
-                      <a:pPr marL="0" indent="0">
-                        <a:buNone/>
-                      </a:pPr>
-                      <a:r>
-                        <a:rPr lang="en-US" sz="1400" dirty="0"/>
-                        <a:t>SID-SEDD</a:t>
-                      </a:r>
-                    </a:p>
-                    <a:p>
-                      <a:pPr marL="0" indent="0">
-                        <a:buNone/>
-                      </a:pPr>
-                      <a:r>
-                        <a:rPr lang="en-US" sz="1400" dirty="0"/>
-                        <a:t>76 contextual predictors</a:t>
-                      </a:r>
-                    </a:p>
-                  </a:txBody>
-                  <a:tcPr marL="63500" marR="63500" marT="38100" marB="38100">
-                    <a:lnL w="12700" cap="flat" cmpd="sng" algn="ctr">
-                      <a:solidFill>
-                        <a:srgbClr val="000000"/>
-                      </a:solidFill>
-                      <a:prstDash val="solid"/>
-                      <a:round/>
-                      <a:headEnd type="none" w="med" len="med"/>
-                      <a:tailEnd type="none" w="med" len="med"/>
-                    </a:lnL>
-                    <a:lnR w="12700" cap="flat" cmpd="sng" algn="ctr">
-                      <a:solidFill>
-                        <a:srgbClr val="000000"/>
-                      </a:solidFill>
-                      <a:prstDash val="solid"/>
-                      <a:round/>
-                      <a:headEnd type="none" w="med" len="med"/>
-                      <a:tailEnd type="none" w="med" len="med"/>
-                    </a:lnR>
-                    <a:lnT w="12700" cap="flat" cmpd="sng" algn="ctr">
-                      <a:solidFill>
-                        <a:srgbClr val="000000"/>
-                      </a:solidFill>
-                      <a:prstDash val="solid"/>
-                      <a:round/>
-                      <a:headEnd type="none" w="med" len="med"/>
-                      <a:tailEnd type="none" w="med" len="med"/>
-                    </a:lnT>
-                    <a:lnB w="12700" cap="flat" cmpd="sng" algn="ctr">
-                      <a:solidFill>
-                        <a:srgbClr val="000000"/>
-                      </a:solidFill>
-                      <a:prstDash val="solid"/>
-                      <a:round/>
-                      <a:headEnd type="none" w="med" len="med"/>
-                      <a:tailEnd type="none" w="med" len="med"/>
-                    </a:lnB>
-                  </a:tcPr>
-                </a:tc>
-                <a:tc>
-                  <a:txBody>
-                    <a:bodyPr/>
-                    <a:lstStyle/>
-                    <a:p>
-                      <a:pPr marL="0" indent="0">
-                        <a:buNone/>
-                      </a:pPr>
-                      <a:r>
-                        <a:rPr lang="en-US" sz="1400" u="sng" dirty="0">
+                        <a:rPr lang="en-US" sz="1200" u="sng" dirty="0">
                           <a:solidFill>
                             <a:srgbClr val="0563C1"/>
                           </a:solidFill>
@@ -11730,7 +11303,7 @@
                         <a:t>Reich et al.</a:t>
                       </a:r>
                       <a:r>
-                        <a:rPr lang="en-US" sz="1400" dirty="0"/>
+                        <a:rPr lang="en-US" sz="1200" dirty="0"/>
                         <a:t> — Accuracy of real-time multi-model ensemble forecasts for seasonal influenza</a:t>
                       </a:r>
                     </a:p>
@@ -11799,7 +11372,7 @@
         <p:spPr>
           <a:xfrm>
             <a:off x="469556" y="6427022"/>
-            <a:ext cx="1490536" cy="307777"/>
+            <a:ext cx="2174954" cy="307777"/>
           </a:xfrm>
           <a:prstGeom prst="rect">
             <a:avLst/>
@@ -11829,11 +11402,158 @@
               </a:rPr>
               <a:t>Darts</a:t>
             </a:r>
-            <a:endParaRPr lang="en-US" sz="1400" b="1" dirty="0">
-              <a:solidFill>
-                <a:srgbClr val="92D050"/>
-              </a:solidFill>
-            </a:endParaRPr>
+            <a:r>
+              <a:rPr lang="en-US" sz="1400" b="1" dirty="0">
+                <a:solidFill>
+                  <a:srgbClr val="92D050"/>
+                </a:solidFill>
+              </a:rPr>
+              <a:t> (python)</a:t>
+            </a:r>
+          </a:p>
+        </p:txBody>
+      </p:sp>
+      <p:sp>
+        <p:nvSpPr>
+          <p:cNvPr id="4" name="TextBox 3">
+            <a:extLst>
+              <a:ext uri="{FF2B5EF4-FFF2-40B4-BE49-F238E27FC236}">
+                <a16:creationId xmlns:a16="http://schemas.microsoft.com/office/drawing/2014/main" id="{43E6D564-AC1C-6D7F-5693-26B48476D84F}"/>
+              </a:ext>
+            </a:extLst>
+          </p:cNvPr>
+          <p:cNvSpPr txBox="1"/>
+          <p:nvPr/>
+        </p:nvSpPr>
+        <p:spPr>
+          <a:xfrm>
+            <a:off x="2644510" y="6427022"/>
+            <a:ext cx="1965859" cy="307777"/>
+          </a:xfrm>
+          <a:prstGeom prst="rect">
+            <a:avLst/>
+          </a:prstGeom>
+          <a:noFill/>
+        </p:spPr>
+        <p:txBody>
+          <a:bodyPr wrap="none" rtlCol="0">
+            <a:spAutoFit/>
+          </a:bodyPr>
+          <a:lstStyle/>
+          <a:p>
+            <a:r>
+              <a:rPr lang="en-US" sz="1400" b="1" dirty="0">
+                <a:solidFill>
+                  <a:srgbClr val="7030A0"/>
+                </a:solidFill>
+              </a:rPr>
+              <a:t>Available in </a:t>
+            </a:r>
+            <a:r>
+              <a:rPr lang="en-US" sz="1400" b="1" dirty="0">
+                <a:solidFill>
+                  <a:schemeClr val="accent2">
+                    <a:lumMod val="60000"/>
+                    <a:lumOff val="40000"/>
+                  </a:schemeClr>
+                </a:solidFill>
+                <a:hlinkClick r:id="rId11"/>
+              </a:rPr>
+              <a:t>Forecast</a:t>
+            </a:r>
+            <a:r>
+              <a:rPr lang="en-US" sz="1400" b="1" dirty="0">
+                <a:solidFill>
+                  <a:srgbClr val="7030A0"/>
+                </a:solidFill>
+              </a:rPr>
+              <a:t> (R)</a:t>
+            </a:r>
+          </a:p>
+        </p:txBody>
+      </p:sp>
+      <p:sp>
+        <p:nvSpPr>
+          <p:cNvPr id="6" name="TextBox 5">
+            <a:extLst>
+              <a:ext uri="{FF2B5EF4-FFF2-40B4-BE49-F238E27FC236}">
+                <a16:creationId xmlns:a16="http://schemas.microsoft.com/office/drawing/2014/main" id="{D6CCBF9E-BA1B-3D44-AC56-51C3FB0BD284}"/>
+              </a:ext>
+            </a:extLst>
+          </p:cNvPr>
+          <p:cNvSpPr txBox="1"/>
+          <p:nvPr/>
+        </p:nvSpPr>
+        <p:spPr>
+          <a:xfrm>
+            <a:off x="4542721" y="6427022"/>
+            <a:ext cx="2249783" cy="307777"/>
+          </a:xfrm>
+          <a:prstGeom prst="rect">
+            <a:avLst/>
+          </a:prstGeom>
+          <a:noFill/>
+        </p:spPr>
+        <p:txBody>
+          <a:bodyPr wrap="none" rtlCol="0">
+            <a:spAutoFit/>
+          </a:bodyPr>
+          <a:lstStyle/>
+          <a:p>
+            <a:r>
+              <a:rPr lang="en-US" sz="1400" b="1" dirty="0">
+                <a:solidFill>
+                  <a:schemeClr val="accent4">
+                    <a:lumMod val="75000"/>
+                  </a:schemeClr>
+                </a:solidFill>
+              </a:rPr>
+              <a:t>Available in</a:t>
+            </a:r>
+            <a:r>
+              <a:rPr lang="en-US" sz="1400" b="1" dirty="0">
+                <a:solidFill>
+                  <a:schemeClr val="accent2">
+                    <a:lumMod val="60000"/>
+                    <a:lumOff val="40000"/>
+                  </a:schemeClr>
+                </a:solidFill>
+              </a:rPr>
+              <a:t> </a:t>
+            </a:r>
+            <a:r>
+              <a:rPr lang="en-US" sz="1400" b="1" dirty="0">
+                <a:solidFill>
+                  <a:schemeClr val="accent2">
+                    <a:lumMod val="60000"/>
+                    <a:lumOff val="40000"/>
+                  </a:schemeClr>
+                </a:solidFill>
+                <a:hlinkClick r:id="rId12"/>
+              </a:rPr>
+              <a:t>CARBayesST</a:t>
+            </a:r>
+            <a:r>
+              <a:rPr lang="en-US" sz="1400" b="1" dirty="0">
+                <a:solidFill>
+                  <a:schemeClr val="accent2">
+                    <a:lumMod val="60000"/>
+                    <a:lumOff val="40000"/>
+                  </a:schemeClr>
+                </a:solidFill>
+              </a:rPr>
+              <a:t> </a:t>
+            </a:r>
+            <a:r>
+              <a:rPr lang="en-US" sz="1400" b="1" dirty="0">
+                <a:solidFill>
+                  <a:schemeClr val="accent4">
+                    <a:lumMod val="75000"/>
+                  </a:schemeClr>
+                </a:solidFill>
+              </a:rPr>
+              <a:t>(R)</a:t>
+            </a:r>
           </a:p>
         </p:txBody>
       </p:sp>
@@ -11887,7 +11607,7 @@
               <a:buNone/>
             </a:pPr>
             <a:r>
-              <a:rPr lang="en-US" sz="2400" b="1" dirty="0">
+              <a:rPr lang="en-US" sz="2400" b="1" u="sng" dirty="0">
                 <a:solidFill>
                   <a:schemeClr val="accent1"/>
                 </a:solidFill>
@@ -11921,28 +11641,21 @@
           <p:nvPr>
             <p:extLst>
               <p:ext uri="{D42A27DB-BD31-4B8C-83A1-F6EECF244321}">
-                <p14:modId xmlns:p14="http://schemas.microsoft.com/office/powerpoint/2010/main" val="3467577899"/>
+                <p14:modId xmlns:p14="http://schemas.microsoft.com/office/powerpoint/2010/main" val="1093757671"/>
               </p:ext>
             </p:extLst>
           </p:nvPr>
         </p:nvGraphicFramePr>
         <p:xfrm>
           <a:off x="201168" y="693214"/>
-          <a:ext cx="11777472" cy="2717251"/>
+          <a:ext cx="11276275" cy="2717251"/>
         </p:xfrm>
         <a:graphic>
           <a:graphicData uri="http://schemas.openxmlformats.org/drawingml/2006/table">
             <a:tbl>
               <a:tblPr/>
               <a:tblGrid>
-                <a:gridCol w="347472">
-                  <a:extLst>
-                    <a:ext uri="{9D8B030D-6E8A-4147-A177-3AD203B41FA5}">
-                      <a16:colId xmlns:a16="http://schemas.microsoft.com/office/drawing/2014/main" val="20000"/>
-                    </a:ext>
-                  </a:extLst>
-                </a:gridCol>
-                <a:gridCol w="2743200">
+                <a:gridCol w="2589475">
                   <a:extLst>
                     <a:ext uri="{9D8B030D-6E8A-4147-A177-3AD203B41FA5}">
                       <a16:colId xmlns:a16="http://schemas.microsoft.com/office/drawing/2014/main" val="20001"/>
@@ -11970,67 +11683,6 @@
                     <a:bodyPr/>
                     <a:lstStyle/>
                     <a:p>
-                      <a:pPr marL="0" indent="0" algn="ctr">
-                        <a:buNone/>
-                      </a:pPr>
-                      <a:r>
-                        <a:rPr lang="en-US" sz="1400" b="1" dirty="0">
-                          <a:solidFill>
-                            <a:srgbClr val="000000"/>
-                          </a:solidFill>
-                        </a:rPr>
-                        <a:t>#</a:t>
-                      </a:r>
-                      <a:endParaRPr lang="en-US" sz="1400" dirty="0"/>
-                    </a:p>
-                  </a:txBody>
-                  <a:tcPr marL="63500" marR="63500" marT="38100" marB="38100" anchor="ctr">
-                    <a:lnL w="12700" cap="flat" cmpd="sng" algn="ctr">
-                      <a:solidFill>
-                        <a:srgbClr val="000000"/>
-                      </a:solidFill>
-                      <a:prstDash val="solid"/>
-                      <a:round/>
-                      <a:headEnd type="none" w="med" len="med"/>
-                      <a:tailEnd type="none" w="med" len="med"/>
-                    </a:lnL>
-                    <a:lnR w="12700" cap="flat" cmpd="sng" algn="ctr">
-                      <a:solidFill>
-                        <a:srgbClr val="000000"/>
-                      </a:solidFill>
-                      <a:prstDash val="solid"/>
-                      <a:round/>
-                      <a:headEnd type="none" w="med" len="med"/>
-                      <a:tailEnd type="none" w="med" len="med"/>
-                    </a:lnR>
-                    <a:lnT w="12700" cap="flat" cmpd="sng" algn="ctr">
-                      <a:solidFill>
-                        <a:srgbClr val="000000"/>
-                      </a:solidFill>
-                      <a:prstDash val="solid"/>
-                      <a:round/>
-                      <a:headEnd type="none" w="med" len="med"/>
-                      <a:tailEnd type="none" w="med" len="med"/>
-                    </a:lnT>
-                    <a:lnB w="12700" cap="flat" cmpd="sng" algn="ctr">
-                      <a:solidFill>
-                        <a:srgbClr val="000000"/>
-                      </a:solidFill>
-                      <a:prstDash val="solid"/>
-                      <a:round/>
-                      <a:headEnd type="none" w="med" len="med"/>
-                      <a:tailEnd type="none" w="med" len="med"/>
-                    </a:lnB>
-                    <a:solidFill>
-                      <a:srgbClr val="FFFFFF"/>
-                    </a:solidFill>
-                  </a:tcPr>
-                </a:tc>
-                <a:tc>
-                  <a:txBody>
-                    <a:bodyPr/>
-                    <a:lstStyle/>
-                    <a:p>
                       <a:pPr marL="0" indent="0">
                         <a:buNone/>
                       </a:pPr>
@@ -12216,60 +11868,6 @@
                 </a:extLst>
               </a:tr>
               <a:tr h="715672">
-                <a:tc>
-                  <a:txBody>
-                    <a:bodyPr/>
-                    <a:lstStyle/>
-                    <a:p>
-                      <a:pPr marL="0" indent="0" algn="ctr">
-                        <a:buNone/>
-                      </a:pPr>
-                      <a:r>
-                        <a:rPr lang="en-US" sz="1400" b="1" dirty="0"/>
-                        <a:t>8</a:t>
-                      </a:r>
-                      <a:endParaRPr lang="en-US" sz="1400" dirty="0"/>
-                    </a:p>
-                  </a:txBody>
-                  <a:tcPr marL="63500" marR="63500" marT="38100" marB="38100">
-                    <a:lnL w="12700" cap="flat" cmpd="sng" algn="ctr">
-                      <a:solidFill>
-                        <a:srgbClr val="000000"/>
-                      </a:solidFill>
-                      <a:prstDash val="solid"/>
-                      <a:round/>
-                      <a:headEnd type="none" w="med" len="med"/>
-                      <a:tailEnd type="none" w="med" len="med"/>
-                    </a:lnL>
-                    <a:lnR w="12700" cap="flat" cmpd="sng" algn="ctr">
-                      <a:solidFill>
-                        <a:srgbClr val="000000"/>
-                      </a:solidFill>
-                      <a:prstDash val="solid"/>
-                      <a:round/>
-                      <a:headEnd type="none" w="med" len="med"/>
-                      <a:tailEnd type="none" w="med" len="med"/>
-                    </a:lnR>
-                    <a:lnT w="12700" cap="flat" cmpd="sng" algn="ctr">
-                      <a:solidFill>
-                        <a:srgbClr val="000000"/>
-                      </a:solidFill>
-                      <a:prstDash val="solid"/>
-                      <a:round/>
-                      <a:headEnd type="none" w="med" len="med"/>
-                      <a:tailEnd type="none" w="med" len="med"/>
-                    </a:lnT>
-                    <a:lnB w="12700" cap="flat" cmpd="sng" algn="ctr">
-                      <a:solidFill>
-                        <a:srgbClr val="000000"/>
-                      </a:solidFill>
-                      <a:prstDash val="solid"/>
-                      <a:round/>
-                      <a:headEnd type="none" w="med" len="med"/>
-                      <a:tailEnd type="none" w="med" len="med"/>
-                    </a:lnB>
-                  </a:tcPr>
-                </a:tc>
                 <a:tc>
                   <a:txBody>
                     <a:bodyPr/>
@@ -12611,65 +12209,11 @@
                     <a:bodyPr/>
                     <a:lstStyle/>
                     <a:p>
-                      <a:pPr marL="0" indent="0" algn="ctr">
-                        <a:buNone/>
-                      </a:pPr>
-                      <a:r>
-                        <a:rPr lang="en-US" sz="1400" b="1" dirty="0"/>
-                        <a:t>9</a:t>
-                      </a:r>
-                      <a:endParaRPr lang="en-US" sz="1400" dirty="0"/>
-                    </a:p>
-                  </a:txBody>
-                  <a:tcPr marL="63500" marR="63500" marT="38100" marB="38100">
-                    <a:lnL w="12700" cap="flat" cmpd="sng" algn="ctr">
-                      <a:solidFill>
-                        <a:srgbClr val="000000"/>
-                      </a:solidFill>
-                      <a:prstDash val="solid"/>
-                      <a:round/>
-                      <a:headEnd type="none" w="med" len="med"/>
-                      <a:tailEnd type="none" w="med" len="med"/>
-                    </a:lnL>
-                    <a:lnR w="12700" cap="flat" cmpd="sng" algn="ctr">
-                      <a:solidFill>
-                        <a:srgbClr val="000000"/>
-                      </a:solidFill>
-                      <a:prstDash val="solid"/>
-                      <a:round/>
-                      <a:headEnd type="none" w="med" len="med"/>
-                      <a:tailEnd type="none" w="med" len="med"/>
-                    </a:lnR>
-                    <a:lnT w="12700" cap="flat" cmpd="sng" algn="ctr">
-                      <a:solidFill>
-                        <a:srgbClr val="000000"/>
-                      </a:solidFill>
-                      <a:prstDash val="solid"/>
-                      <a:round/>
-                      <a:headEnd type="none" w="med" len="med"/>
-                      <a:tailEnd type="none" w="med" len="med"/>
-                    </a:lnT>
-                    <a:lnB w="12700" cap="flat" cmpd="sng" algn="ctr">
-                      <a:solidFill>
-                        <a:srgbClr val="000000"/>
-                      </a:solidFill>
-                      <a:prstDash val="solid"/>
-                      <a:round/>
-                      <a:headEnd type="none" w="med" len="med"/>
-                      <a:tailEnd type="none" w="med" len="med"/>
-                    </a:lnB>
-                  </a:tcPr>
-                </a:tc>
-                <a:tc>
-                  <a:txBody>
-                    <a:bodyPr/>
-                    <a:lstStyle/>
-                    <a:p>
                       <a:pPr marL="0" indent="0">
                         <a:buNone/>
                       </a:pPr>
                       <a:r>
-                        <a:rPr lang="en-US" sz="1400" b="1" dirty="0" err="1">
+                        <a:rPr lang="en-US" sz="1400" b="1" dirty="0">
                           <a:solidFill>
                             <a:srgbClr val="C00000"/>
                           </a:solidFill>
@@ -12900,7 +12444,7 @@
         <p:spPr>
           <a:xfrm>
             <a:off x="469556" y="6427022"/>
-            <a:ext cx="3163110" cy="307777"/>
+            <a:ext cx="4080348" cy="307777"/>
           </a:xfrm>
           <a:prstGeom prst="rect">
             <a:avLst/>
@@ -12928,13 +12472,16 @@
                 </a:solidFill>
                 <a:hlinkClick r:id="rId10"/>
               </a:rPr>
-              <a:t>Hugging Face - Transformers</a:t>
+              <a:t>Hugging Face – Transformers</a:t>
             </a:r>
-            <a:endParaRPr lang="en-US" sz="1400" b="1" dirty="0">
-              <a:solidFill>
-                <a:srgbClr val="C00000"/>
-              </a:solidFill>
-            </a:endParaRPr>
+            <a:r>
+              <a:rPr lang="en-US" sz="1400" b="1" dirty="0">
+                <a:solidFill>
+                  <a:srgbClr val="C00000"/>
+                </a:solidFill>
+              </a:rPr>
+              <a:t> (python) </a:t>
+            </a:r>
           </a:p>
         </p:txBody>
       </p:sp>
@@ -12988,7 +12535,7 @@
               <a:buNone/>
             </a:pPr>
             <a:r>
-              <a:rPr lang="en-US" sz="2400" b="1" dirty="0">
+              <a:rPr lang="en-US" sz="2400" b="1" u="sng" dirty="0">
                 <a:solidFill>
                   <a:schemeClr val="accent1"/>
                 </a:solidFill>
@@ -13022,35 +12569,28 @@
           <p:nvPr>
             <p:extLst>
               <p:ext uri="{D42A27DB-BD31-4B8C-83A1-F6EECF244321}">
-                <p14:modId xmlns:p14="http://schemas.microsoft.com/office/powerpoint/2010/main" val="2544998560"/>
+                <p14:modId xmlns:p14="http://schemas.microsoft.com/office/powerpoint/2010/main" val="2253507245"/>
               </p:ext>
             </p:extLst>
           </p:nvPr>
         </p:nvGraphicFramePr>
         <p:xfrm>
           <a:off x="201168" y="713232"/>
-          <a:ext cx="11777472" cy="5895162"/>
+          <a:ext cx="11223266" cy="5895162"/>
         </p:xfrm>
         <a:graphic>
           <a:graphicData uri="http://schemas.openxmlformats.org/drawingml/2006/table">
             <a:tbl>
               <a:tblPr/>
               <a:tblGrid>
-                <a:gridCol w="347472">
-                  <a:extLst>
-                    <a:ext uri="{9D8B030D-6E8A-4147-A177-3AD203B41FA5}">
-                      <a16:colId xmlns:a16="http://schemas.microsoft.com/office/drawing/2014/main" val="20000"/>
-                    </a:ext>
-                  </a:extLst>
-                </a:gridCol>
-                <a:gridCol w="2743200">
+                <a:gridCol w="2860084">
                   <a:extLst>
                     <a:ext uri="{9D8B030D-6E8A-4147-A177-3AD203B41FA5}">
                       <a16:colId xmlns:a16="http://schemas.microsoft.com/office/drawing/2014/main" val="20001"/>
                     </a:ext>
                   </a:extLst>
                 </a:gridCol>
-                <a:gridCol w="3200400">
+                <a:gridCol w="2876782">
                   <a:extLst>
                     <a:ext uri="{9D8B030D-6E8A-4147-A177-3AD203B41FA5}">
                       <a16:colId xmlns:a16="http://schemas.microsoft.com/office/drawing/2014/main" val="20002"/>
@@ -13071,67 +12611,6 @@
                     <a:bodyPr/>
                     <a:lstStyle/>
                     <a:p>
-                      <a:pPr marL="0" indent="0" algn="ctr">
-                        <a:buNone/>
-                      </a:pPr>
-                      <a:r>
-                        <a:rPr lang="en-US" sz="1400" b="1" dirty="0">
-                          <a:solidFill>
-                            <a:srgbClr val="000000"/>
-                          </a:solidFill>
-                        </a:rPr>
-                        <a:t>#</a:t>
-                      </a:r>
-                      <a:endParaRPr lang="en-US" sz="1400" dirty="0"/>
-                    </a:p>
-                  </a:txBody>
-                  <a:tcPr marL="63500" marR="63500" marT="38100" marB="38100" anchor="ctr">
-                    <a:lnL w="12700" cap="flat" cmpd="sng" algn="ctr">
-                      <a:solidFill>
-                        <a:srgbClr val="000000"/>
-                      </a:solidFill>
-                      <a:prstDash val="solid"/>
-                      <a:round/>
-                      <a:headEnd type="none" w="med" len="med"/>
-                      <a:tailEnd type="none" w="med" len="med"/>
-                    </a:lnL>
-                    <a:lnR w="12700" cap="flat" cmpd="sng" algn="ctr">
-                      <a:solidFill>
-                        <a:srgbClr val="000000"/>
-                      </a:solidFill>
-                      <a:prstDash val="solid"/>
-                      <a:round/>
-                      <a:headEnd type="none" w="med" len="med"/>
-                      <a:tailEnd type="none" w="med" len="med"/>
-                    </a:lnR>
-                    <a:lnT w="12700" cap="flat" cmpd="sng" algn="ctr">
-                      <a:solidFill>
-                        <a:srgbClr val="000000"/>
-                      </a:solidFill>
-                      <a:prstDash val="solid"/>
-                      <a:round/>
-                      <a:headEnd type="none" w="med" len="med"/>
-                      <a:tailEnd type="none" w="med" len="med"/>
-                    </a:lnT>
-                    <a:lnB w="12700" cap="flat" cmpd="sng" algn="ctr">
-                      <a:solidFill>
-                        <a:srgbClr val="000000"/>
-                      </a:solidFill>
-                      <a:prstDash val="solid"/>
-                      <a:round/>
-                      <a:headEnd type="none" w="med" len="med"/>
-                      <a:tailEnd type="none" w="med" len="med"/>
-                    </a:lnB>
-                    <a:solidFill>
-                      <a:srgbClr val="FFFFFF"/>
-                    </a:solidFill>
-                  </a:tcPr>
-                </a:tc>
-                <a:tc>
-                  <a:txBody>
-                    <a:bodyPr/>
-                    <a:lstStyle/>
-                    <a:p>
                       <a:pPr marL="0" indent="0">
                         <a:buNone/>
                       </a:pPr>
@@ -13317,60 +12796,6 @@
                 </a:extLst>
               </a:tr>
               <a:tr h="729048">
-                <a:tc>
-                  <a:txBody>
-                    <a:bodyPr/>
-                    <a:lstStyle/>
-                    <a:p>
-                      <a:pPr marL="0" indent="0" algn="ctr">
-                        <a:buNone/>
-                      </a:pPr>
-                      <a:r>
-                        <a:rPr lang="en-US" sz="1400" b="1" dirty="0"/>
-                        <a:t>10</a:t>
-                      </a:r>
-                      <a:endParaRPr lang="en-US" sz="1400" dirty="0"/>
-                    </a:p>
-                  </a:txBody>
-                  <a:tcPr marL="63500" marR="63500" marT="38100" marB="38100">
-                    <a:lnL w="12700" cap="flat" cmpd="sng" algn="ctr">
-                      <a:solidFill>
-                        <a:srgbClr val="000000"/>
-                      </a:solidFill>
-                      <a:prstDash val="solid"/>
-                      <a:round/>
-                      <a:headEnd type="none" w="med" len="med"/>
-                      <a:tailEnd type="none" w="med" len="med"/>
-                    </a:lnL>
-                    <a:lnR w="12700" cap="flat" cmpd="sng" algn="ctr">
-                      <a:solidFill>
-                        <a:srgbClr val="000000"/>
-                      </a:solidFill>
-                      <a:prstDash val="solid"/>
-                      <a:round/>
-                      <a:headEnd type="none" w="med" len="med"/>
-                      <a:tailEnd type="none" w="med" len="med"/>
-                    </a:lnR>
-                    <a:lnT w="12700" cap="flat" cmpd="sng" algn="ctr">
-                      <a:solidFill>
-                        <a:srgbClr val="000000"/>
-                      </a:solidFill>
-                      <a:prstDash val="solid"/>
-                      <a:round/>
-                      <a:headEnd type="none" w="med" len="med"/>
-                      <a:tailEnd type="none" w="med" len="med"/>
-                    </a:lnT>
-                    <a:lnB w="12700" cap="flat" cmpd="sng" algn="ctr">
-                      <a:solidFill>
-                        <a:srgbClr val="000000"/>
-                      </a:solidFill>
-                      <a:prstDash val="solid"/>
-                      <a:round/>
-                      <a:headEnd type="none" w="med" len="med"/>
-                      <a:tailEnd type="none" w="med" len="med"/>
-                    </a:lnB>
-                  </a:tcPr>
-                </a:tc>
                 <a:tc>
                   <a:txBody>
                     <a:bodyPr/>
@@ -13699,60 +13124,6 @@
                     <a:bodyPr/>
                     <a:lstStyle/>
                     <a:p>
-                      <a:pPr marL="0" indent="0" algn="ctr">
-                        <a:buNone/>
-                      </a:pPr>
-                      <a:r>
-                        <a:rPr lang="en-US" sz="1400" b="1" dirty="0"/>
-                        <a:t>11</a:t>
-                      </a:r>
-                      <a:endParaRPr lang="en-US" sz="1400" dirty="0"/>
-                    </a:p>
-                  </a:txBody>
-                  <a:tcPr marL="63500" marR="63500" marT="38100" marB="38100">
-                    <a:lnL w="12700" cap="flat" cmpd="sng" algn="ctr">
-                      <a:solidFill>
-                        <a:srgbClr val="000000"/>
-                      </a:solidFill>
-                      <a:prstDash val="solid"/>
-                      <a:round/>
-                      <a:headEnd type="none" w="med" len="med"/>
-                      <a:tailEnd type="none" w="med" len="med"/>
-                    </a:lnL>
-                    <a:lnR w="12700" cap="flat" cmpd="sng" algn="ctr">
-                      <a:solidFill>
-                        <a:srgbClr val="000000"/>
-                      </a:solidFill>
-                      <a:prstDash val="solid"/>
-                      <a:round/>
-                      <a:headEnd type="none" w="med" len="med"/>
-                      <a:tailEnd type="none" w="med" len="med"/>
-                    </a:lnR>
-                    <a:lnT w="12700" cap="flat" cmpd="sng" algn="ctr">
-                      <a:solidFill>
-                        <a:srgbClr val="000000"/>
-                      </a:solidFill>
-                      <a:prstDash val="solid"/>
-                      <a:round/>
-                      <a:headEnd type="none" w="med" len="med"/>
-                      <a:tailEnd type="none" w="med" len="med"/>
-                    </a:lnT>
-                    <a:lnB w="12700" cap="flat" cmpd="sng" algn="ctr">
-                      <a:solidFill>
-                        <a:srgbClr val="000000"/>
-                      </a:solidFill>
-                      <a:prstDash val="solid"/>
-                      <a:round/>
-                      <a:headEnd type="none" w="med" len="med"/>
-                      <a:tailEnd type="none" w="med" len="med"/>
-                    </a:lnB>
-                  </a:tcPr>
-                </a:tc>
-                <a:tc>
-                  <a:txBody>
-                    <a:bodyPr/>
-                    <a:lstStyle/>
-                    <a:p>
                       <a:pPr marL="0" indent="0">
                         <a:buNone/>
                       </a:pPr>
@@ -14041,60 +13412,6 @@
                     <a:bodyPr/>
                     <a:lstStyle/>
                     <a:p>
-                      <a:pPr marL="0" indent="0" algn="ctr">
-                        <a:buNone/>
-                      </a:pPr>
-                      <a:r>
-                        <a:rPr lang="en-US" sz="1400" b="1" dirty="0"/>
-                        <a:t>12</a:t>
-                      </a:r>
-                      <a:endParaRPr lang="en-US" sz="1400" dirty="0"/>
-                    </a:p>
-                  </a:txBody>
-                  <a:tcPr marL="63500" marR="63500" marT="38100" marB="38100">
-                    <a:lnL w="12700" cap="flat" cmpd="sng" algn="ctr">
-                      <a:solidFill>
-                        <a:srgbClr val="000000"/>
-                      </a:solidFill>
-                      <a:prstDash val="solid"/>
-                      <a:round/>
-                      <a:headEnd type="none" w="med" len="med"/>
-                      <a:tailEnd type="none" w="med" len="med"/>
-                    </a:lnL>
-                    <a:lnR w="12700" cap="flat" cmpd="sng" algn="ctr">
-                      <a:solidFill>
-                        <a:srgbClr val="000000"/>
-                      </a:solidFill>
-                      <a:prstDash val="solid"/>
-                      <a:round/>
-                      <a:headEnd type="none" w="med" len="med"/>
-                      <a:tailEnd type="none" w="med" len="med"/>
-                    </a:lnR>
-                    <a:lnT w="12700" cap="flat" cmpd="sng" algn="ctr">
-                      <a:solidFill>
-                        <a:srgbClr val="000000"/>
-                      </a:solidFill>
-                      <a:prstDash val="solid"/>
-                      <a:round/>
-                      <a:headEnd type="none" w="med" len="med"/>
-                      <a:tailEnd type="none" w="med" len="med"/>
-                    </a:lnT>
-                    <a:lnB w="12700" cap="flat" cmpd="sng" algn="ctr">
-                      <a:solidFill>
-                        <a:srgbClr val="000000"/>
-                      </a:solidFill>
-                      <a:prstDash val="solid"/>
-                      <a:round/>
-                      <a:headEnd type="none" w="med" len="med"/>
-                      <a:tailEnd type="none" w="med" len="med"/>
-                    </a:lnB>
-                  </a:tcPr>
-                </a:tc>
-                <a:tc>
-                  <a:txBody>
-                    <a:bodyPr/>
-                    <a:lstStyle/>
-                    <a:p>
                       <a:pPr marL="0" indent="0">
                         <a:buNone/>
                       </a:pPr>
@@ -14338,74 +13655,12 @@
                     <a:bodyPr/>
                     <a:lstStyle/>
                     <a:p>
-                      <a:pPr marL="0" indent="0" algn="ctr">
+                      <a:pPr marL="0" indent="0">
                         <a:buNone/>
                       </a:pPr>
                       <a:r>
                         <a:rPr lang="en-US" sz="1400" b="1" dirty="0"/>
-                        <a:t>13</a:t>
-                      </a:r>
-                      <a:endParaRPr lang="en-US" sz="1400" dirty="0"/>
-                    </a:p>
-                  </a:txBody>
-                  <a:tcPr marL="63500" marR="63500" marT="38100" marB="38100">
-                    <a:lnL w="12700" cap="flat" cmpd="sng" algn="ctr">
-                      <a:solidFill>
-                        <a:srgbClr val="000000"/>
-                      </a:solidFill>
-                      <a:prstDash val="solid"/>
-                      <a:round/>
-                      <a:headEnd type="none" w="med" len="med"/>
-                      <a:tailEnd type="none" w="med" len="med"/>
-                    </a:lnL>
-                    <a:lnR w="12700" cap="flat" cmpd="sng" algn="ctr">
-                      <a:solidFill>
-                        <a:srgbClr val="000000"/>
-                      </a:solidFill>
-                      <a:prstDash val="solid"/>
-                      <a:round/>
-                      <a:headEnd type="none" w="med" len="med"/>
-                      <a:tailEnd type="none" w="med" len="med"/>
-                    </a:lnR>
-                    <a:lnT w="12700" cap="flat" cmpd="sng" algn="ctr">
-                      <a:solidFill>
-                        <a:srgbClr val="000000"/>
-                      </a:solidFill>
-                      <a:prstDash val="solid"/>
-                      <a:round/>
-                      <a:headEnd type="none" w="med" len="med"/>
-                      <a:tailEnd type="none" w="med" len="med"/>
-                    </a:lnT>
-                    <a:lnB w="12700" cap="flat" cmpd="sng" algn="ctr">
-                      <a:solidFill>
-                        <a:srgbClr val="000000"/>
-                      </a:solidFill>
-                      <a:prstDash val="solid"/>
-                      <a:round/>
-                      <a:headEnd type="none" w="med" len="med"/>
-                      <a:tailEnd type="none" w="med" len="med"/>
-                    </a:lnB>
-                  </a:tcPr>
-                </a:tc>
-                <a:tc>
-                  <a:txBody>
-                    <a:bodyPr/>
-                    <a:lstStyle/>
-                    <a:p>
-                      <a:pPr marL="0" indent="0">
-                        <a:buNone/>
-                      </a:pPr>
-                      <a:r>
-                        <a:rPr lang="en-US" sz="1400" b="1" dirty="0"/>
-                        <a:t>Weighted Ensemble (RF, </a:t>
-                      </a:r>
-                      <a:r>
-                        <a:rPr lang="en-US" sz="1400" b="1" dirty="0" err="1"/>
-                        <a:t>XGBoost</a:t>
-                      </a:r>
-                      <a:r>
-                        <a:rPr lang="en-US" sz="1400" b="1" dirty="0"/>
-                        <a:t>, CatBoost)</a:t>
+                        <a:t>Weighted Ensemble (RF, XGBoost, CatBoost)</a:t>
                       </a:r>
                       <a:endParaRPr lang="en-US" sz="1400" dirty="0"/>
                     </a:p>
@@ -14696,7 +13951,7 @@
               <a:buNone/>
             </a:pPr>
             <a:r>
-              <a:rPr lang="en-US" sz="2400" b="1" dirty="0">
+              <a:rPr lang="en-US" sz="2400" b="1" u="sng" dirty="0">
                 <a:solidFill>
                   <a:schemeClr val="accent1"/>
                 </a:solidFill>
@@ -14730,28 +13985,21 @@
           <p:nvPr>
             <p:extLst>
               <p:ext uri="{D42A27DB-BD31-4B8C-83A1-F6EECF244321}">
-                <p14:modId xmlns:p14="http://schemas.microsoft.com/office/powerpoint/2010/main" val="3030221993"/>
+                <p14:modId xmlns:p14="http://schemas.microsoft.com/office/powerpoint/2010/main" val="1246944139"/>
               </p:ext>
             </p:extLst>
           </p:nvPr>
         </p:nvGraphicFramePr>
         <p:xfrm>
           <a:off x="201168" y="713232"/>
-          <a:ext cx="11777472" cy="2277515"/>
+          <a:ext cx="11276275" cy="2490875"/>
         </p:xfrm>
         <a:graphic>
           <a:graphicData uri="http://schemas.openxmlformats.org/drawingml/2006/table">
             <a:tbl>
               <a:tblPr/>
               <a:tblGrid>
-                <a:gridCol w="347472">
-                  <a:extLst>
-                    <a:ext uri="{9D8B030D-6E8A-4147-A177-3AD203B41FA5}">
-                      <a16:colId xmlns:a16="http://schemas.microsoft.com/office/drawing/2014/main" val="20000"/>
-                    </a:ext>
-                  </a:extLst>
-                </a:gridCol>
-                <a:gridCol w="2743200">
+                <a:gridCol w="2589475">
                   <a:extLst>
                     <a:ext uri="{9D8B030D-6E8A-4147-A177-3AD203B41FA5}">
                       <a16:colId xmlns:a16="http://schemas.microsoft.com/office/drawing/2014/main" val="20001"/>
@@ -14779,67 +14027,6 @@
                     <a:bodyPr/>
                     <a:lstStyle/>
                     <a:p>
-                      <a:pPr marL="0" indent="0" algn="ctr">
-                        <a:buNone/>
-                      </a:pPr>
-                      <a:r>
-                        <a:rPr lang="en-US" sz="1400" b="1" dirty="0">
-                          <a:solidFill>
-                            <a:srgbClr val="000000"/>
-                          </a:solidFill>
-                        </a:rPr>
-                        <a:t>#</a:t>
-                      </a:r>
-                      <a:endParaRPr lang="en-US" sz="1400" dirty="0"/>
-                    </a:p>
-                  </a:txBody>
-                  <a:tcPr marL="63500" marR="63500" marT="38100" marB="38100" anchor="ctr">
-                    <a:lnL w="12700" cap="flat" cmpd="sng" algn="ctr">
-                      <a:solidFill>
-                        <a:srgbClr val="000000"/>
-                      </a:solidFill>
-                      <a:prstDash val="solid"/>
-                      <a:round/>
-                      <a:headEnd type="none" w="med" len="med"/>
-                      <a:tailEnd type="none" w="med" len="med"/>
-                    </a:lnL>
-                    <a:lnR w="12700" cap="flat" cmpd="sng" algn="ctr">
-                      <a:solidFill>
-                        <a:srgbClr val="000000"/>
-                      </a:solidFill>
-                      <a:prstDash val="solid"/>
-                      <a:round/>
-                      <a:headEnd type="none" w="med" len="med"/>
-                      <a:tailEnd type="none" w="med" len="med"/>
-                    </a:lnR>
-                    <a:lnT w="12700" cap="flat" cmpd="sng" algn="ctr">
-                      <a:solidFill>
-                        <a:srgbClr val="000000"/>
-                      </a:solidFill>
-                      <a:prstDash val="solid"/>
-                      <a:round/>
-                      <a:headEnd type="none" w="med" len="med"/>
-                      <a:tailEnd type="none" w="med" len="med"/>
-                    </a:lnT>
-                    <a:lnB w="12700" cap="flat" cmpd="sng" algn="ctr">
-                      <a:solidFill>
-                        <a:srgbClr val="000000"/>
-                      </a:solidFill>
-                      <a:prstDash val="solid"/>
-                      <a:round/>
-                      <a:headEnd type="none" w="med" len="med"/>
-                      <a:tailEnd type="none" w="med" len="med"/>
-                    </a:lnB>
-                    <a:solidFill>
-                      <a:srgbClr val="FFFFFF"/>
-                    </a:solidFill>
-                  </a:tcPr>
-                </a:tc>
-                <a:tc>
-                  <a:txBody>
-                    <a:bodyPr/>
-                    <a:lstStyle/>
-                    <a:p>
                       <a:pPr marL="0" indent="0">
                         <a:buNone/>
                       </a:pPr>
@@ -15024,61 +14211,7 @@
                   </a:ext>
                 </a:extLst>
               </a:tr>
-              <a:tr h="1198605">
-                <a:tc>
-                  <a:txBody>
-                    <a:bodyPr/>
-                    <a:lstStyle/>
-                    <a:p>
-                      <a:pPr marL="0" indent="0" algn="ctr">
-                        <a:buNone/>
-                      </a:pPr>
-                      <a:r>
-                        <a:rPr lang="en-US" sz="1400" b="1" dirty="0"/>
-                        <a:t>14</a:t>
-                      </a:r>
-                      <a:endParaRPr lang="en-US" sz="1400" dirty="0"/>
-                    </a:p>
-                  </a:txBody>
-                  <a:tcPr marL="63500" marR="63500" marT="38100" marB="38100">
-                    <a:lnL w="12700" cap="flat" cmpd="sng" algn="ctr">
-                      <a:solidFill>
-                        <a:srgbClr val="000000"/>
-                      </a:solidFill>
-                      <a:prstDash val="solid"/>
-                      <a:round/>
-                      <a:headEnd type="none" w="med" len="med"/>
-                      <a:tailEnd type="none" w="med" len="med"/>
-                    </a:lnL>
-                    <a:lnR w="12700" cap="flat" cmpd="sng" algn="ctr">
-                      <a:solidFill>
-                        <a:srgbClr val="000000"/>
-                      </a:solidFill>
-                      <a:prstDash val="solid"/>
-                      <a:round/>
-                      <a:headEnd type="none" w="med" len="med"/>
-                      <a:tailEnd type="none" w="med" len="med"/>
-                    </a:lnR>
-                    <a:lnT w="12700" cap="flat" cmpd="sng" algn="ctr">
-                      <a:solidFill>
-                        <a:srgbClr val="000000"/>
-                      </a:solidFill>
-                      <a:prstDash val="solid"/>
-                      <a:round/>
-                      <a:headEnd type="none" w="med" len="med"/>
-                      <a:tailEnd type="none" w="med" len="med"/>
-                    </a:lnT>
-                    <a:lnB w="12700" cap="flat" cmpd="sng" algn="ctr">
-                      <a:solidFill>
-                        <a:srgbClr val="000000"/>
-                      </a:solidFill>
-                      <a:prstDash val="solid"/>
-                      <a:round/>
-                      <a:headEnd type="none" w="med" len="med"/>
-                      <a:tailEnd type="none" w="med" len="med"/>
-                    </a:lnB>
-                  </a:tcPr>
-                </a:tc>
+              <a:tr h="0">
                 <a:tc>
                   <a:txBody>
                     <a:bodyPr/>
@@ -15291,6 +14424,540 @@
         </a:graphic>
       </p:graphicFrame>
     </p:spTree>
+  </p:cSld>
+  <p:clrMapOvr>
+    <a:masterClrMapping/>
+  </p:clrMapOvr>
+</p:sld>
+</file>
+
+<file path=ppt/slides/slide9.xml><?xml version="1.0" encoding="utf-8"?>
+<p:sld xmlns:a="http://schemas.openxmlformats.org/drawingml/2006/main" xmlns:r="http://schemas.openxmlformats.org/officeDocument/2006/relationships" xmlns:p="http://schemas.openxmlformats.org/presentationml/2006/main">
+  <p:cSld>
+    <p:spTree>
+      <p:nvGrpSpPr>
+        <p:cNvPr id="1" name=""/>
+        <p:cNvGrpSpPr/>
+        <p:nvPr/>
+      </p:nvGrpSpPr>
+      <p:grpSpPr>
+        <a:xfrm>
+          <a:off x="0" y="0"/>
+          <a:ext cx="0" cy="0"/>
+          <a:chOff x="0" y="0"/>
+          <a:chExt cx="0" cy="0"/>
+        </a:xfrm>
+      </p:grpSpPr>
+      <p:sp>
+        <p:nvSpPr>
+          <p:cNvPr id="6" name="TextBox 5">
+            <a:extLst>
+              <a:ext uri="{FF2B5EF4-FFF2-40B4-BE49-F238E27FC236}">
+                <a16:creationId xmlns:a16="http://schemas.microsoft.com/office/drawing/2014/main" id="{EB37A17B-2B97-E23C-2AAA-7FB3D80708C7}"/>
+              </a:ext>
+            </a:extLst>
+          </p:cNvPr>
+          <p:cNvSpPr txBox="1"/>
+          <p:nvPr/>
+        </p:nvSpPr>
+        <p:spPr>
+          <a:xfrm>
+            <a:off x="1031132" y="1655354"/>
+            <a:ext cx="10223770" cy="3323987"/>
+          </a:xfrm>
+          <a:prstGeom prst="rect">
+            <a:avLst/>
+          </a:prstGeom>
+          <a:solidFill>
+            <a:schemeClr val="tx1">
+              <a:lumMod val="85000"/>
+              <a:lumOff val="15000"/>
+            </a:schemeClr>
+          </a:solidFill>
+        </p:spPr>
+        <p:txBody>
+          <a:bodyPr wrap="square" rtlCol="0">
+            <a:spAutoFit/>
+          </a:bodyPr>
+          <a:lstStyle/>
+          <a:p>
+            <a:r>
+              <a:rPr lang="en-US" sz="1400" dirty="0">
+                <a:solidFill>
+                  <a:schemeClr val="bg1"/>
+                </a:solidFill>
+                <a:latin typeface="Andale Mono" panose="020B0509000000000004" pitchFamily="49" charset="0"/>
+              </a:rPr>
+              <a:t>.</a:t>
+            </a:r>
+          </a:p>
+          <a:p>
+            <a:r>
+              <a:rPr lang="en-US" sz="1400" dirty="0">
+                <a:solidFill>
+                  <a:schemeClr val="bg1"/>
+                </a:solidFill>
+                <a:latin typeface="Andale Mono" panose="020B0509000000000004" pitchFamily="49" charset="0"/>
+              </a:rPr>
+              <a:t>├── config/          # Model configs, hyperparameters, YAML files</a:t>
+            </a:r>
+          </a:p>
+          <a:p>
+            <a:r>
+              <a:rPr lang="en-US" sz="1400" dirty="0">
+                <a:solidFill>
+                  <a:schemeClr val="bg1"/>
+                </a:solidFill>
+                <a:latin typeface="Andale Mono" panose="020B0509000000000004" pitchFamily="49" charset="0"/>
+              </a:rPr>
+              <a:t>├── data/ </a:t>
+            </a:r>
+          </a:p>
+          <a:p>
+            <a:r>
+              <a:rPr lang="en-US" sz="1400" dirty="0">
+                <a:solidFill>
+                  <a:schemeClr val="bg1"/>
+                </a:solidFill>
+                <a:latin typeface="Andale Mono" panose="020B0509000000000004" pitchFamily="49" charset="0"/>
+              </a:rPr>
+              <a:t>│   └── raw          # All data — this is gitignored</a:t>
+            </a:r>
+          </a:p>
+          <a:p>
+            <a:r>
+              <a:rPr lang="en-US" sz="1400" dirty="0">
+                <a:solidFill>
+                  <a:schemeClr val="bg1"/>
+                </a:solidFill>
+                <a:latin typeface="Andale Mono" panose="020B0509000000000004" pitchFamily="49" charset="0"/>
+              </a:rPr>
+              <a:t>├── docs/            # Project documentation and data access instructions</a:t>
+            </a:r>
+          </a:p>
+          <a:p>
+            <a:r>
+              <a:rPr lang="en-US" sz="1400" dirty="0">
+                <a:solidFill>
+                  <a:schemeClr val="bg1"/>
+                </a:solidFill>
+                <a:latin typeface="Andale Mono" panose="020B0509000000000004" pitchFamily="49" charset="0"/>
+              </a:rPr>
+              <a:t>├── notebooks/       # Exploratory and communicative work  </a:t>
+            </a:r>
+          </a:p>
+          <a:p>
+            <a:r>
+              <a:rPr lang="en-US" sz="1400" dirty="0">
+                <a:solidFill>
+                  <a:schemeClr val="bg1"/>
+                </a:solidFill>
+                <a:latin typeface="Andale Mono" panose="020B0509000000000004" pitchFamily="49" charset="0"/>
+              </a:rPr>
+              <a:t>├── src/             </a:t>
+            </a:r>
+          </a:p>
+          <a:p>
+            <a:r>
+              <a:rPr lang="en-US" sz="1400" dirty="0">
+                <a:solidFill>
+                  <a:schemeClr val="bg1"/>
+                </a:solidFill>
+                <a:latin typeface="Andale Mono" panose="020B0509000000000004" pitchFamily="49" charset="0"/>
+              </a:rPr>
+              <a:t>│   ├── dynamical/   # </a:t>
+            </a:r>
+            <a:r>
+              <a:rPr lang="en-US" sz="1400" dirty="0">
+                <a:solidFill>
+                  <a:schemeClr val="accent2"/>
+                </a:solidFill>
+                <a:latin typeface="Andale Mono" panose="020B0509000000000004" pitchFamily="49" charset="0"/>
+              </a:rPr>
+              <a:t>Dynamic model of suicide contagion</a:t>
+            </a:r>
+            <a:r>
+              <a:rPr lang="en-US" sz="1400" dirty="0">
+                <a:solidFill>
+                  <a:schemeClr val="bg1"/>
+                </a:solidFill>
+                <a:latin typeface="Andale Mono" panose="020B0509000000000004" pitchFamily="49" charset="0"/>
+              </a:rPr>
+              <a:t>       </a:t>
+            </a:r>
+          </a:p>
+          <a:p>
+            <a:r>
+              <a:rPr lang="en-US" sz="1400" dirty="0">
+                <a:solidFill>
+                  <a:schemeClr val="bg1"/>
+                </a:solidFill>
+                <a:latin typeface="Andale Mono" panose="020B0509000000000004" pitchFamily="49" charset="0"/>
+              </a:rPr>
+              <a:t>│   ├── ensemble/    # Multi-model combination logic; weighted averaging; scoring rules</a:t>
+            </a:r>
+          </a:p>
+          <a:p>
+            <a:r>
+              <a:rPr lang="en-US" sz="1400" dirty="0">
+                <a:solidFill>
+                  <a:schemeClr val="bg1"/>
+                </a:solidFill>
+                <a:latin typeface="Andale Mono" panose="020B0509000000000004" pitchFamily="49" charset="0"/>
+              </a:rPr>
+              <a:t>│   ├── ml/          # </a:t>
+            </a:r>
+            <a:r>
+              <a:rPr lang="en-US" sz="1400" dirty="0">
+                <a:solidFill>
+                  <a:srgbClr val="FFFF00"/>
+                </a:solidFill>
+                <a:latin typeface="Andale Mono" panose="020B0509000000000004" pitchFamily="49" charset="0"/>
+              </a:rPr>
+              <a:t>LightGBM</a:t>
+            </a:r>
+            <a:r>
+              <a:rPr lang="en-US" sz="1400" dirty="0">
+                <a:solidFill>
+                  <a:schemeClr val="bg1"/>
+                </a:solidFill>
+                <a:latin typeface="Andale Mono" panose="020B0509000000000004" pitchFamily="49" charset="0"/>
+              </a:rPr>
+              <a:t>, </a:t>
+            </a:r>
+            <a:r>
+              <a:rPr lang="en-US" sz="1400" dirty="0">
+                <a:solidFill>
+                  <a:srgbClr val="FFFF00"/>
+                </a:solidFill>
+                <a:latin typeface="Andale Mono" panose="020B0509000000000004" pitchFamily="49" charset="0"/>
+              </a:rPr>
+              <a:t>RF</a:t>
+            </a:r>
+            <a:r>
+              <a:rPr lang="en-US" sz="1400" dirty="0">
+                <a:solidFill>
+                  <a:schemeClr val="bg1"/>
+                </a:solidFill>
+                <a:latin typeface="Andale Mono" panose="020B0509000000000004" pitchFamily="49" charset="0"/>
+              </a:rPr>
+              <a:t>, </a:t>
+            </a:r>
+            <a:r>
+              <a:rPr lang="en-US" sz="1400" dirty="0">
+                <a:solidFill>
+                  <a:srgbClr val="FFFF00"/>
+                </a:solidFill>
+                <a:latin typeface="Andale Mono" panose="020B0509000000000004" pitchFamily="49" charset="0"/>
+              </a:rPr>
+              <a:t>XGBoost</a:t>
+            </a:r>
+            <a:r>
+              <a:rPr lang="en-US" sz="1400" dirty="0">
+                <a:solidFill>
+                  <a:schemeClr val="bg1"/>
+                </a:solidFill>
+                <a:latin typeface="Andale Mono" panose="020B0509000000000004" pitchFamily="49" charset="0"/>
+              </a:rPr>
+              <a:t>, </a:t>
+            </a:r>
+            <a:r>
+              <a:rPr lang="en-US" sz="1400" dirty="0">
+                <a:solidFill>
+                  <a:srgbClr val="FFFF00"/>
+                </a:solidFill>
+                <a:latin typeface="Andale Mono" panose="020B0509000000000004" pitchFamily="49" charset="0"/>
+              </a:rPr>
+              <a:t>CatBoost</a:t>
+            </a:r>
+            <a:r>
+              <a:rPr lang="en-US" sz="1400" dirty="0">
+                <a:solidFill>
+                  <a:schemeClr val="bg1"/>
+                </a:solidFill>
+                <a:latin typeface="Andale Mono" panose="020B0509000000000004" pitchFamily="49" charset="0"/>
+              </a:rPr>
+              <a:t>, NN training and evaluation      </a:t>
+            </a:r>
+          </a:p>
+          <a:p>
+            <a:r>
+              <a:rPr lang="en-US" sz="1400" dirty="0">
+                <a:solidFill>
+                  <a:schemeClr val="bg1"/>
+                </a:solidFill>
+                <a:latin typeface="Andale Mono" panose="020B0509000000000004" pitchFamily="49" charset="0"/>
+              </a:rPr>
+              <a:t>│   ├── nlp/         # </a:t>
+            </a:r>
+            <a:r>
+              <a:rPr lang="en-US" sz="1400" dirty="0">
+                <a:solidFill>
+                  <a:srgbClr val="FFFF00"/>
+                </a:solidFill>
+                <a:latin typeface="Andale Mono" panose="020B0509000000000004" pitchFamily="49" charset="0"/>
+              </a:rPr>
+              <a:t>distilBERT</a:t>
+            </a:r>
+            <a:r>
+              <a:rPr lang="en-US" sz="1400" dirty="0">
+                <a:solidFill>
+                  <a:schemeClr val="bg1"/>
+                </a:solidFill>
+                <a:latin typeface="Andale Mono" panose="020B0509000000000004" pitchFamily="49" charset="0"/>
+              </a:rPr>
+              <a:t> pipelines; NVDRS-RAD narrative processing</a:t>
+            </a:r>
+          </a:p>
+          <a:p>
+            <a:r>
+              <a:rPr lang="en-US" sz="1400" dirty="0">
+                <a:solidFill>
+                  <a:schemeClr val="bg1"/>
+                </a:solidFill>
+                <a:latin typeface="Andale Mono" panose="020B0509000000000004" pitchFamily="49" charset="0"/>
+              </a:rPr>
+              <a:t>│   └── statistical/ # Bayesian hierarchical models: </a:t>
+            </a:r>
+            <a:r>
+              <a:rPr lang="en-US" sz="1400">
+                <a:solidFill>
+                  <a:srgbClr val="FFFF00"/>
+                </a:solidFill>
+                <a:latin typeface="Andale Mono" panose="020B0509000000000004" pitchFamily="49" charset="0"/>
+              </a:rPr>
+              <a:t>Exponential Smoothing</a:t>
+            </a:r>
+            <a:r>
+              <a:rPr lang="en-US" sz="1400" dirty="0">
+                <a:solidFill>
+                  <a:schemeClr val="bg1"/>
+                </a:solidFill>
+                <a:latin typeface="Andale Mono" panose="020B0509000000000004" pitchFamily="49" charset="0"/>
+              </a:rPr>
+              <a:t>; </a:t>
+            </a:r>
+            <a:r>
+              <a:rPr lang="en-US" sz="1400" dirty="0">
+                <a:solidFill>
+                  <a:schemeClr val="accent1">
+                    <a:lumMod val="60000"/>
+                    <a:lumOff val="40000"/>
+                  </a:schemeClr>
+                </a:solidFill>
+                <a:latin typeface="Andale Mono" panose="020B0509000000000004" pitchFamily="49" charset="0"/>
+              </a:rPr>
+              <a:t>ARIMA</a:t>
+            </a:r>
+            <a:r>
+              <a:rPr lang="en-US" sz="1400" dirty="0">
+                <a:solidFill>
+                  <a:schemeClr val="bg1"/>
+                </a:solidFill>
+                <a:latin typeface="Andale Mono" panose="020B0509000000000004" pitchFamily="49" charset="0"/>
+              </a:rPr>
+              <a:t>; </a:t>
+            </a:r>
+            <a:r>
+              <a:rPr lang="en-US" sz="1400" dirty="0">
+                <a:solidFill>
+                  <a:schemeClr val="accent1">
+                    <a:lumMod val="60000"/>
+                    <a:lumOff val="40000"/>
+                  </a:schemeClr>
+                </a:solidFill>
+                <a:latin typeface="Andale Mono" panose="020B0509000000000004" pitchFamily="49" charset="0"/>
+              </a:rPr>
+              <a:t>CAR-ANOVA</a:t>
+            </a:r>
+            <a:r>
+              <a:rPr lang="en-US" sz="1400" dirty="0">
+                <a:solidFill>
+                  <a:schemeClr val="bg1"/>
+                </a:solidFill>
+                <a:latin typeface="Andale Mono" panose="020B0509000000000004" pitchFamily="49" charset="0"/>
+              </a:rPr>
+              <a:t>   </a:t>
+            </a:r>
+          </a:p>
+          <a:p>
+            <a:r>
+              <a:rPr lang="en-US" sz="1400" dirty="0">
+                <a:solidFill>
+                  <a:schemeClr val="bg1"/>
+                </a:solidFill>
+                <a:latin typeface="Andale Mono" panose="020B0509000000000004" pitchFamily="49" charset="0"/>
+              </a:rPr>
+              <a:t>└── test/ </a:t>
+            </a:r>
+          </a:p>
+          <a:p>
+            <a:endParaRPr lang="en-US" sz="1400" dirty="0">
+              <a:solidFill>
+                <a:schemeClr val="bg1"/>
+              </a:solidFill>
+              <a:latin typeface="Andale Mono" panose="020B0509000000000004" pitchFamily="49" charset="0"/>
+            </a:endParaRPr>
+          </a:p>
+          <a:p>
+            <a:endParaRPr lang="en-US" sz="1400" dirty="0">
+              <a:solidFill>
+                <a:schemeClr val="bg1"/>
+              </a:solidFill>
+              <a:latin typeface="Andale Mono" panose="020B0509000000000004" pitchFamily="49" charset="0"/>
+            </a:endParaRPr>
+          </a:p>
+        </p:txBody>
+      </p:sp>
+      <p:sp>
+        <p:nvSpPr>
+          <p:cNvPr id="7" name="Text 0">
+            <a:extLst>
+              <a:ext uri="{FF2B5EF4-FFF2-40B4-BE49-F238E27FC236}">
+                <a16:creationId xmlns:a16="http://schemas.microsoft.com/office/drawing/2014/main" id="{6FF3A345-E3F3-3CD0-B38A-E1DAFC222F81}"/>
+              </a:ext>
+            </a:extLst>
+          </p:cNvPr>
+          <p:cNvSpPr/>
+          <p:nvPr/>
+        </p:nvSpPr>
+        <p:spPr>
+          <a:xfrm>
+            <a:off x="201168" y="91440"/>
+            <a:ext cx="11777472" cy="502920"/>
+          </a:xfrm>
+          <a:prstGeom prst="rect">
+            <a:avLst/>
+          </a:prstGeom>
+          <a:noFill/>
+          <a:ln/>
+        </p:spPr>
+        <p:txBody>
+          <a:bodyPr wrap="square" rtlCol="0" anchor="ctr"/>
+          <a:lstStyle/>
+          <a:p>
+            <a:r>
+              <a:rPr lang="en-US" sz="2400" b="1" dirty="0">
+                <a:solidFill>
+                  <a:srgbClr val="000000"/>
+                </a:solidFill>
+                <a:latin typeface="Calibri" pitchFamily="34" charset="0"/>
+                <a:ea typeface="Calibri" pitchFamily="34" charset="-122"/>
+                <a:cs typeface="Calibri" pitchFamily="34" charset="-120"/>
+                <a:hlinkClick r:id="rId2"/>
+              </a:rPr>
+              <a:t>https://github.com/MatteoPS/suicide_forecasting/</a:t>
+            </a:r>
+            <a:r>
+              <a:rPr lang="en-US" sz="2400" b="1" dirty="0">
+                <a:solidFill>
+                  <a:srgbClr val="000000"/>
+                </a:solidFill>
+                <a:latin typeface="Calibri" pitchFamily="34" charset="0"/>
+                <a:ea typeface="Calibri" pitchFamily="34" charset="-122"/>
+                <a:cs typeface="Calibri" pitchFamily="34" charset="-120"/>
+              </a:rPr>
+              <a:t>  Repo structure</a:t>
+            </a:r>
+            <a:endParaRPr lang="en-US" sz="2400" dirty="0"/>
+          </a:p>
+        </p:txBody>
+      </p:sp>
+      <p:sp>
+        <p:nvSpPr>
+          <p:cNvPr id="8" name="TextBox 7">
+            <a:extLst>
+              <a:ext uri="{FF2B5EF4-FFF2-40B4-BE49-F238E27FC236}">
+                <a16:creationId xmlns:a16="http://schemas.microsoft.com/office/drawing/2014/main" id="{D6786B01-9FA1-5905-6DD6-E8F801D29848}"/>
+              </a:ext>
+            </a:extLst>
+          </p:cNvPr>
+          <p:cNvSpPr txBox="1"/>
+          <p:nvPr/>
+        </p:nvSpPr>
+        <p:spPr>
+          <a:xfrm>
+            <a:off x="1031132" y="4610009"/>
+            <a:ext cx="2110386" cy="369332"/>
+          </a:xfrm>
+          <a:prstGeom prst="rect">
+            <a:avLst/>
+          </a:prstGeom>
+          <a:noFill/>
+        </p:spPr>
+        <p:txBody>
+          <a:bodyPr wrap="none" rtlCol="0">
+            <a:spAutoFit/>
+          </a:bodyPr>
+          <a:lstStyle/>
+          <a:p>
+            <a:r>
+              <a:rPr lang="en-US" dirty="0">
+                <a:solidFill>
+                  <a:schemeClr val="accent2"/>
+                </a:solidFill>
+              </a:rPr>
+              <a:t>MATLAB</a:t>
+            </a:r>
+            <a:r>
+              <a:rPr lang="en-US" dirty="0"/>
+              <a:t> </a:t>
+            </a:r>
+            <a:r>
+              <a:rPr lang="en-US" dirty="0">
+                <a:solidFill>
+                  <a:schemeClr val="bg1"/>
+                </a:solidFill>
+              </a:rPr>
+              <a:t>- </a:t>
+            </a:r>
+            <a:r>
+              <a:rPr lang="en-US" dirty="0">
+                <a:solidFill>
+                  <a:srgbClr val="FFFF00"/>
+                </a:solidFill>
+              </a:rPr>
+              <a:t>Python</a:t>
+            </a:r>
+            <a:r>
+              <a:rPr lang="en-US" dirty="0">
+                <a:solidFill>
+                  <a:schemeClr val="accent1">
+                    <a:lumMod val="60000"/>
+                    <a:lumOff val="40000"/>
+                  </a:schemeClr>
+                </a:solidFill>
+              </a:rPr>
+              <a:t> </a:t>
+            </a:r>
+            <a:r>
+              <a:rPr lang="en-US" dirty="0">
+                <a:solidFill>
+                  <a:schemeClr val="bg1"/>
+                </a:solidFill>
+              </a:rPr>
+              <a:t>- </a:t>
+            </a:r>
+            <a:r>
+              <a:rPr lang="en-US" dirty="0">
+                <a:solidFill>
+                  <a:schemeClr val="accent1">
+                    <a:lumMod val="60000"/>
+                    <a:lumOff val="40000"/>
+                  </a:schemeClr>
+                </a:solidFill>
+              </a:rPr>
+              <a:t>R</a:t>
+            </a:r>
+          </a:p>
+        </p:txBody>
+      </p:sp>
+    </p:spTree>
+    <p:extLst>
+      <p:ext uri="{BB962C8B-B14F-4D97-AF65-F5344CB8AC3E}">
+        <p14:creationId xmlns:p14="http://schemas.microsoft.com/office/powerpoint/2010/main" val="3310297667"/>
+      </p:ext>
+    </p:extLst>
   </p:cSld>
   <p:clrMapOvr>
     <a:masterClrMapping/>

--- a/docs/Suicide_forcasting_note_slides.pptx
+++ b/docs/Suicide_forcasting_note_slides.pptx
@@ -14462,8 +14462,8 @@
         </p:nvSpPr>
         <p:spPr>
           <a:xfrm>
-            <a:off x="1031132" y="1655354"/>
-            <a:ext cx="10223770" cy="3323987"/>
+            <a:off x="560717" y="1655354"/>
+            <a:ext cx="10694185" cy="3970318"/>
           </a:xfrm>
           <a:prstGeom prst="rect">
             <a:avLst/>
@@ -14499,7 +14499,7 @@
                 </a:solidFill>
                 <a:latin typeface="Andale Mono" panose="020B0509000000000004" pitchFamily="49" charset="0"/>
               </a:rPr>
-              <a:t>├── config/          # Model configs, hyperparameters, YAML files</a:t>
+              <a:t>├── config/		# Model configs, hyperparameters, YAML files</a:t>
             </a:r>
           </a:p>
           <a:p>
@@ -14510,7 +14510,7 @@
                 </a:solidFill>
                 <a:latin typeface="Andale Mono" panose="020B0509000000000004" pitchFamily="49" charset="0"/>
               </a:rPr>
-              <a:t>├── data/ </a:t>
+              <a:t>├── data/</a:t>
             </a:r>
           </a:p>
           <a:p>
@@ -14521,7 +14521,7 @@
                 </a:solidFill>
                 <a:latin typeface="Andale Mono" panose="020B0509000000000004" pitchFamily="49" charset="0"/>
               </a:rPr>
-              <a:t>│   └── raw          # All data — this is gitignored</a:t>
+              <a:t>│   ├── external/</a:t>
             </a:r>
           </a:p>
           <a:p>
@@ -14532,7 +14532,7 @@
                 </a:solidFill>
                 <a:latin typeface="Andale Mono" panose="020B0509000000000004" pitchFamily="49" charset="0"/>
               </a:rPr>
-              <a:t>├── docs/            # Project documentation and data access instructions</a:t>
+              <a:t>│   ├── processed/</a:t>
             </a:r>
           </a:p>
           <a:p>
@@ -14543,7 +14543,7 @@
                 </a:solidFill>
                 <a:latin typeface="Andale Mono" panose="020B0509000000000004" pitchFamily="49" charset="0"/>
               </a:rPr>
-              <a:t>├── notebooks/       # Exploratory and communicative work  </a:t>
+              <a:t>│   └── raw		# All data — this is gitignored</a:t>
             </a:r>
           </a:p>
           <a:p>
@@ -14554,7 +14554,7 @@
                 </a:solidFill>
                 <a:latin typeface="Andale Mono" panose="020B0509000000000004" pitchFamily="49" charset="0"/>
               </a:rPr>
-              <a:t>├── src/             </a:t>
+              <a:t>├── docs/		# Project documentation and data access instructions</a:t>
             </a:r>
           </a:p>
           <a:p>
@@ -14565,7 +14565,40 @@
                 </a:solidFill>
                 <a:latin typeface="Andale Mono" panose="020B0509000000000004" pitchFamily="49" charset="0"/>
               </a:rPr>
-              <a:t>│   ├── dynamical/   # </a:t>
+              <a:t>├── notebooks/		# Exploratory and communicative work  </a:t>
+            </a:r>
+          </a:p>
+          <a:p>
+            <a:r>
+              <a:rPr lang="en-US" sz="1400" dirty="0">
+                <a:solidFill>
+                  <a:schemeClr val="bg1"/>
+                </a:solidFill>
+                <a:latin typeface="Andale Mono" panose="020B0509000000000004" pitchFamily="49" charset="0"/>
+              </a:rPr>
+              <a:t>├── src/ </a:t>
+            </a:r>
+          </a:p>
+          <a:p>
+            <a:r>
+              <a:rPr lang="en-US" sz="1400" dirty="0">
+                <a:solidFill>
+                  <a:schemeClr val="bg1"/>
+                </a:solidFill>
+                <a:latin typeface="Andale Mono" panose="020B0509000000000004" pitchFamily="49" charset="0"/>
+              </a:rPr>
+              <a:t>│   ├── data		# Data import, cleaning, transform</a:t>
+            </a:r>
+          </a:p>
+          <a:p>
+            <a:r>
+              <a:rPr lang="en-US" sz="1400" dirty="0">
+                <a:solidFill>
+                  <a:schemeClr val="bg1"/>
+                </a:solidFill>
+                <a:latin typeface="Andale Mono" panose="020B0509000000000004" pitchFamily="49" charset="0"/>
+              </a:rPr>
+              <a:t>│   ├── dynamic/		# </a:t>
             </a:r>
             <a:r>
               <a:rPr lang="en-US" sz="1400" dirty="0">
@@ -14594,7 +14627,7 @@
                 </a:solidFill>
                 <a:latin typeface="Andale Mono" panose="020B0509000000000004" pitchFamily="49" charset="0"/>
               </a:rPr>
-              <a:t>│   ├── ensemble/    # Multi-model combination logic; weighted averaging; scoring rules</a:t>
+              <a:t>│   ├── ensemble/		# Multi-model combination logic; weighted averaging; scoring rules</a:t>
             </a:r>
           </a:p>
           <a:p>
@@ -14605,7 +14638,7 @@
                 </a:solidFill>
                 <a:latin typeface="Andale Mono" panose="020B0509000000000004" pitchFamily="49" charset="0"/>
               </a:rPr>
-              <a:t>│   ├── ml/          # </a:t>
+              <a:t>│   ├── ml/		# </a:t>
             </a:r>
             <a:r>
               <a:rPr lang="en-US" sz="1400" dirty="0">
@@ -14688,7 +14721,7 @@
                 </a:solidFill>
                 <a:latin typeface="Andale Mono" panose="020B0509000000000004" pitchFamily="49" charset="0"/>
               </a:rPr>
-              <a:t>│   ├── nlp/         # </a:t>
+              <a:t>│   ├── nlp/		# </a:t>
             </a:r>
             <a:r>
               <a:rPr lang="en-US" sz="1400" dirty="0">
@@ -14717,10 +14750,10 @@
                 </a:solidFill>
                 <a:latin typeface="Andale Mono" panose="020B0509000000000004" pitchFamily="49" charset="0"/>
               </a:rPr>
-              <a:t>│   └── statistical/ # Bayesian hierarchical models: </a:t>
+              <a:t>│   └── statistical/	# Bayesian hierarchical models: </a:t>
             </a:r>
             <a:r>
-              <a:rPr lang="en-US" sz="1400">
+              <a:rPr lang="en-US" sz="1400" dirty="0">
                 <a:solidFill>
                   <a:srgbClr val="FFFF00"/>
                 </a:solidFill>
@@ -14788,7 +14821,7 @@
                 </a:solidFill>
                 <a:latin typeface="Andale Mono" panose="020B0509000000000004" pitchFamily="49" charset="0"/>
               </a:rPr>
-              <a:t>└── test/ </a:t>
+              <a:t>└── tests/ </a:t>
             </a:r>
           </a:p>
           <a:p>
@@ -14877,7 +14910,7 @@
         </p:nvSpPr>
         <p:spPr>
           <a:xfrm>
-            <a:off x="1031132" y="4610009"/>
+            <a:off x="841350" y="5117987"/>
             <a:ext cx="2110386" cy="369332"/>
           </a:xfrm>
           <a:prstGeom prst="rect">

--- a/docs/Suicide_forcasting_note_slides.pptx
+++ b/docs/Suicide_forcasting_note_slides.pptx
@@ -14463,7 +14463,7 @@
         <p:spPr>
           <a:xfrm>
             <a:off x="560717" y="1655354"/>
-            <a:ext cx="10694185" cy="3970318"/>
+            <a:ext cx="10694185" cy="4185761"/>
           </a:xfrm>
           <a:prstGeom prst="rect">
             <a:avLst/>
@@ -14750,7 +14750,7 @@
                 </a:solidFill>
                 <a:latin typeface="Andale Mono" panose="020B0509000000000004" pitchFamily="49" charset="0"/>
               </a:rPr>
-              <a:t>│   └── statistical/	# Bayesian hierarchical models: </a:t>
+              <a:t>│   ├── statistical/	# Bayesian hierarchical models: </a:t>
             </a:r>
             <a:r>
               <a:rPr lang="en-US" sz="1400" dirty="0">
@@ -14803,6 +14803,8 @@
               </a:rPr>
               <a:t>CAR-ANOVA</a:t>
             </a:r>
+          </a:p>
+          <a:p>
             <a:r>
               <a:rPr lang="en-US" sz="1400" dirty="0">
                 <a:solidFill>
@@ -14810,7 +14812,7 @@
                 </a:solidFill>
                 <a:latin typeface="Andale Mono" panose="020B0509000000000004" pitchFamily="49" charset="0"/>
               </a:rPr>
-              <a:t>   </a:t>
+              <a:t>│   └── utils/   </a:t>
             </a:r>
           </a:p>
           <a:p>
@@ -14910,7 +14912,7 @@
         </p:nvSpPr>
         <p:spPr>
           <a:xfrm>
-            <a:off x="841350" y="5117987"/>
+            <a:off x="717782" y="5365122"/>
             <a:ext cx="2110386" cy="369332"/>
           </a:xfrm>
           <a:prstGeom prst="rect">

--- a/docs/Suicide_forcasting_note_slides.pptx
+++ b/docs/Suicide_forcasting_note_slides.pptx
@@ -1843,7 +1843,7 @@
           <p:nvPr>
             <p:extLst>
               <p:ext uri="{D42A27DB-BD31-4B8C-83A1-F6EECF244321}">
-                <p14:modId xmlns:p14="http://schemas.microsoft.com/office/powerpoint/2010/main" val="1362055813"/>
+                <p14:modId xmlns:p14="http://schemas.microsoft.com/office/powerpoint/2010/main" val="1856511570"/>
               </p:ext>
             </p:extLst>
           </p:nvPr>
@@ -2621,10 +2621,19 @@
                         <a:buNone/>
                       </a:pPr>
                       <a:r>
+                        <a:rPr lang="en-US" sz="1400" b="0" dirty="0">
+                          <a:solidFill>
+                            <a:srgbClr val="FF0000"/>
+                          </a:solidFill>
+                          <a:effectLst/>
+                        </a:rPr>
+                        <a:t>ACS</a:t>
+                      </a:r>
+                      <a:r>
                         <a:rPr lang="en-US" sz="1400" dirty="0">
                           <a:effectLst/>
                         </a:rPr>
-                        <a:t>ACS;</a:t>
+                        <a:t>;</a:t>
                       </a:r>
                       <a:br>
                         <a:rPr lang="en-US" sz="1400" dirty="0">
@@ -4005,7 +4014,37 @@
                         <a:rPr lang="en-US" sz="1400" dirty="0">
                           <a:effectLst/>
                         </a:rPr>
-                        <a:t>AHRF; Census; ACS; CCBP</a:t>
+                        <a:t>AHRF; </a:t>
+                      </a:r>
+                      <a:r>
+                        <a:rPr lang="en-US" sz="1400" dirty="0">
+                          <a:solidFill>
+                            <a:srgbClr val="FF0000"/>
+                          </a:solidFill>
+                          <a:effectLst/>
+                        </a:rPr>
+                        <a:t>Census</a:t>
+                      </a:r>
+                      <a:r>
+                        <a:rPr lang="en-US" sz="1400" dirty="0">
+                          <a:effectLst/>
+                        </a:rPr>
+                        <a:t>; </a:t>
+                      </a:r>
+                      <a:r>
+                        <a:rPr lang="en-US" sz="1400" dirty="0">
+                          <a:solidFill>
+                            <a:srgbClr val="FF0000"/>
+                          </a:solidFill>
+                          <a:effectLst/>
+                        </a:rPr>
+                        <a:t>ACS</a:t>
+                      </a:r>
+                      <a:r>
+                        <a:rPr lang="en-US" sz="1400" dirty="0">
+                          <a:effectLst/>
+                        </a:rPr>
+                        <a:t>; CCBP</a:t>
                       </a:r>
                     </a:p>
                   </a:txBody>
@@ -4455,9 +4494,18 @@
                       </a:pPr>
                       <a:r>
                         <a:rPr lang="en-US" sz="1400" dirty="0">
+                          <a:solidFill>
+                            <a:srgbClr val="FF0000"/>
+                          </a:solidFill>
                           <a:effectLst/>
                         </a:rPr>
-                        <a:t>ACS; NCES; CCD; AHRQ</a:t>
+                        <a:t>ACS</a:t>
+                      </a:r>
+                      <a:r>
+                        <a:rPr lang="en-US" sz="1400" dirty="0">
+                          <a:effectLst/>
+                        </a:rPr>
+                        <a:t>; NCES; CCD; AHRQ</a:t>
                       </a:r>
                     </a:p>
                   </a:txBody>
@@ -4906,10 +4954,19 @@
                         <a:buNone/>
                       </a:pPr>
                       <a:r>
-                        <a:rPr lang="en-US" sz="1400">
+                        <a:rPr lang="en-US" sz="1400" dirty="0">
                           <a:effectLst/>
                         </a:rPr>
-                        <a:t>CHR; AHRF; ACS</a:t>
+                        <a:t>CHR; AHRF; </a:t>
+                      </a:r>
+                      <a:r>
+                        <a:rPr lang="en-US" sz="1400" dirty="0">
+                          <a:solidFill>
+                            <a:srgbClr val="FF0000"/>
+                          </a:solidFill>
+                          <a:effectLst/>
+                        </a:rPr>
+                        <a:t>ACS</a:t>
                       </a:r>
                     </a:p>
                   </a:txBody>
@@ -5358,7 +5415,10 @@
                         <a:buNone/>
                       </a:pPr>
                       <a:r>
-                        <a:rPr lang="en-US" sz="1400">
+                        <a:rPr lang="en-US" sz="1400" dirty="0">
+                          <a:solidFill>
+                            <a:srgbClr val="FF0000"/>
+                          </a:solidFill>
                           <a:effectLst/>
                         </a:rPr>
                         <a:t>ACS</a:t>
@@ -5668,7 +5728,7 @@
           <p:nvPr>
             <p:extLst>
               <p:ext uri="{D42A27DB-BD31-4B8C-83A1-F6EECF244321}">
-                <p14:modId xmlns:p14="http://schemas.microsoft.com/office/powerpoint/2010/main" val="1610735533"/>
+                <p14:modId xmlns:p14="http://schemas.microsoft.com/office/powerpoint/2010/main" val="1609480812"/>
               </p:ext>
             </p:extLst>
           </p:nvPr>
@@ -7333,6 +7393,9 @@
                       </a:pPr>
                       <a:r>
                         <a:rPr lang="en-US" sz="1400" dirty="0">
+                          <a:solidFill>
+                            <a:srgbClr val="FF0000"/>
+                          </a:solidFill>
                           <a:effectLst/>
                         </a:rPr>
                         <a:t>ACS</a:t>
@@ -7444,7 +7507,7 @@
                         <a:buNone/>
                       </a:pPr>
                       <a:r>
-                        <a:rPr lang="en-US" sz="1400">
+                        <a:rPr lang="en-US" sz="1400" dirty="0">
                           <a:effectLst/>
                         </a:rPr>
                         <a:t>State, County, Zip, Census Tract</a:t>
@@ -8251,10 +8314,19 @@
                         <a:buNone/>
                       </a:pPr>
                       <a:r>
+                        <a:rPr lang="en-US" sz="1400" b="0" dirty="0">
+                          <a:solidFill>
+                            <a:srgbClr val="FF0000"/>
+                          </a:solidFill>
+                          <a:effectLst/>
+                        </a:rPr>
+                        <a:t>BRFSS</a:t>
+                      </a:r>
+                      <a:r>
                         <a:rPr lang="en-US" sz="1400" dirty="0">
                           <a:effectLst/>
                         </a:rPr>
-                        <a:t>BRFSS; CHR; CDC</a:t>
+                        <a:t>; CHR; CDC</a:t>
                       </a:r>
                     </a:p>
                   </a:txBody>
